--- a/Topic_C/Exam_Practice/TC-L05_Speaking_Workshop_Environmental_Solutions.pptx
+++ b/Topic_C/Exam_Practice/TC-L05_Speaking_Workshop_Environmental_Solutions.pptx
@@ -615,7 +615,11 @@
           <a:lstStyle/>
           <a:p>
             <a:r>
-              <a:rPr lang="en-US" dirty="0"/>
+              <a:rPr lang="ar-SA" dirty="0">
+                <a:latin typeface="Amiri" pitchFamily="2" charset="-78"/>
+                <a:ea typeface="Amiri" pitchFamily="2" charset="-78"/>
+                <a:cs typeface="Amiri" pitchFamily="2" charset="-78"/>
+              </a:rPr>
               <a:t>ROLE PLAY C (Develop) — a project report.
 SET-UP IN THE BREAKOUT ROOM: A = examiner (reads the left column ONLY — the questions, in order), B = candidate (sees the task column; Core may use the help column), C = observer (ticks the feedback checklist). 1 minute preparation, about 3 minutes speaking, 1 minute feedback, then rotate.
 Task ! is the unexpected question: in the exam the candidate has not seen it — the examiner should read it without warning.
@@ -707,7 +711,11 @@
           <a:lstStyle/>
           <a:p>
             <a:r>
-              <a:rPr lang="en-US" dirty="0"/>
+              <a:rPr lang="ar-SA" dirty="0">
+                <a:latin typeface="Amiri" pitchFamily="2" charset="-78"/>
+                <a:ea typeface="Amiri" pitchFamily="2" charset="-78"/>
+                <a:cs typeface="Amiri" pitchFamily="2" charset="-78"/>
+              </a:rPr>
               <a:t>ROLE PLAY D (Stretch) — a youth climate summit.
 SET-UP IN THE BREAKOUT ROOM: A = examiner (reads the left column ONLY — the questions, in order), B = candidate (sees the task column; Core may use the help column), C = observer (ticks the feedback checklist). 1 minute preparation, about 3 minutes speaking, 1 minute feedback, then rotate.
 Task ! is the unexpected question: in the exam the candidate has not seen it — the examiner should read it without warning.
@@ -1243,7 +1251,11 @@
           <a:lstStyle/>
           <a:p>
             <a:r>
-              <a:rPr lang="en-US" dirty="0"/>
+              <a:rPr lang="ar-SA" dirty="0">
+                <a:latin typeface="Amiri" pitchFamily="2" charset="-78"/>
+                <a:ea typeface="Amiri" pitchFamily="2" charset="-78"/>
+                <a:cs typeface="Amiri" pitchFamily="2" charset="-78"/>
+              </a:rPr>
               <a:t>TOPIC CONVERSATION — Core. Examiner asks the questions in order and may add “لِمَاذَا؟ / هَلْ يُمْكِنُ أَنْ تَشْرَحَ أَكْثَرَ؟” to push for more. Candidate aims for one full sentence per question.
 </a:t>
             </a:r>
@@ -1332,7 +1344,11 @@
           <a:lstStyle/>
           <a:p>
             <a:r>
-              <a:rPr lang="en-US" dirty="0"/>
+              <a:rPr lang="ar-SA" dirty="0">
+                <a:latin typeface="Amiri" pitchFamily="2" charset="-78"/>
+                <a:ea typeface="Amiri" pitchFamily="2" charset="-78"/>
+                <a:cs typeface="Amiri" pitchFamily="2" charset="-78"/>
+              </a:rPr>
               <a:t>TOPIC CONVERSATION — Develop. Examiner asks the questions in order and may add “لِمَاذَا؟ / هَلْ يُمْكِنُ أَنْ تَشْرَحَ أَكْثَرَ؟” to push for more. Candidate aims for two or three sentences, with a purpose and a past detail.
 </a:t>
             </a:r>
@@ -1421,7 +1437,11 @@
           <a:lstStyle/>
           <a:p>
             <a:r>
-              <a:rPr lang="en-US" dirty="0"/>
+              <a:rPr lang="ar-SA" dirty="0">
+                <a:latin typeface="Amiri" pitchFamily="2" charset="-78"/>
+                <a:ea typeface="Amiri" pitchFamily="2" charset="-78"/>
+                <a:cs typeface="Amiri" pitchFamily="2" charset="-78"/>
+              </a:rPr>
               <a:t>TOPIC CONVERSATION — Stretch. Examiner asks the questions in order and may add “لِمَاذَا؟ / هَلْ يُمْكِنُ أَنْ تَشْرَحَ أَكْثَرَ؟” to push for more. Candidate aims for a developed answer: opinion, balance, concession and a conditional.
 </a:t>
             </a:r>
@@ -1510,7 +1530,11 @@
           <a:lstStyle/>
           <a:p>
             <a:r>
-              <a:rPr lang="en-US" dirty="0"/>
+              <a:rPr lang="ar-SA" dirty="0">
+                <a:latin typeface="Amiri" pitchFamily="2" charset="-78"/>
+                <a:ea typeface="Amiri" pitchFamily="2" charset="-78"/>
+                <a:cs typeface="Amiri" pitchFamily="2" charset="-78"/>
+              </a:rPr>
               <a:t>WELCOME (1 min) — while students join.
 • Greet each student by name as they arrive: السَّلَامُ عَلَيْكُمْ. Take the register (Pastoral Tracker: attendance 0/1).
 • 2-MINUTE CHECK-IN (SEND training): a private chat to any student who seemed unsettled last lesson — “Are you okay today? 👍 / 👎”.
@@ -2224,7 +2248,11 @@
           <a:lstStyle/>
           <a:p>
             <a:r>
-              <a:rPr lang="en-US" dirty="0"/>
+              <a:rPr lang="ar-SA" dirty="0">
+                <a:latin typeface="Amiri" pitchFamily="2" charset="-78"/>
+                <a:ea typeface="Amiri" pitchFamily="2" charset="-78"/>
+                <a:cs typeface="Amiri" pitchFamily="2" charset="-78"/>
+              </a:rPr>
               <a:t>TEACH (3 min). Role play = precise and complete; conversation = develop. Choral repetition of the repair phrases. To a girl: تُعِيدِي.</a:t>
             </a:r>
             <a:endParaRPr lang="en-US" dirty="0"/>
@@ -2312,7 +2340,11 @@
           <a:lstStyle/>
           <a:p>
             <a:r>
-              <a:rPr lang="en-US" dirty="0"/>
+              <a:rPr lang="ar-SA" dirty="0">
+                <a:latin typeface="Amiri" pitchFamily="2" charset="-78"/>
+                <a:ea typeface="Amiri" pitchFamily="2" charset="-78"/>
+                <a:cs typeface="Amiri" pitchFamily="2" charset="-78"/>
+              </a:rPr>
               <a:t>LANGUAGE BANK (2 min) — after أَنْ and لِكَيْ the verb takes fatḥa (subjunctive): نُقَلِّلُ → أَنْ نُقَلِّلَ · نَحْمِي → لِكَيْ نَحْمِيَ. Recycling: نُعِيدُ تَدْوِيرَ البْلَاسْتِيكِ.</a:t>
             </a:r>
             <a:endParaRPr lang="en-US" dirty="0"/>
@@ -2400,7 +2432,11 @@
           <a:lstStyle/>
           <a:p>
             <a:r>
-              <a:rPr lang="en-US" dirty="0"/>
+              <a:rPr lang="ar-SA" dirty="0">
+                <a:latin typeface="Amiri" pitchFamily="2" charset="-78"/>
+                <a:ea typeface="Amiri" pitchFamily="2" charset="-78"/>
+                <a:cs typeface="Amiri" pitchFamily="2" charset="-78"/>
+              </a:rPr>
               <a:t>LANGUAGE BANK (2 min) — advice: يَنْبَغِي أَنْ. Duty: يَجِبُ عَلَى + person + أَنْ. Purpose: لِكَيْ. Condition: إِذَا + past, فَـ + result: إِذَا أَطْفَأْنَا الأَضْوَاءَ، فَسَنُوَفِّرُ الطَّاقَةَ.</a:t>
             </a:r>
             <a:endParaRPr lang="en-US" dirty="0"/>
@@ -2576,7 +2612,11 @@
           <a:lstStyle/>
           <a:p>
             <a:r>
-              <a:rPr lang="en-US" dirty="0"/>
+              <a:rPr lang="ar-SA" dirty="0">
+                <a:latin typeface="Amiri" pitchFamily="2" charset="-78"/>
+                <a:ea typeface="Amiri" pitchFamily="2" charset="-78"/>
+                <a:cs typeface="Amiri" pitchFamily="2" charset="-78"/>
+              </a:rPr>
               <a:t>ROLE PLAY A (Core) — an eco-club meeting.
 SET-UP IN THE BREAKOUT ROOM: A = examiner (reads the left column ONLY — the questions, in order), B = candidate (sees the task column; Core may use the help column), C = observer (ticks the feedback checklist). 1 minute preparation, about 3 minutes speaking, 1 minute feedback, then rotate.
 Task ! is the unexpected question: in the exam the candidate has not seen it — the examiner should read it without warning.
@@ -2668,7 +2708,11 @@
           <a:lstStyle/>
           <a:p>
             <a:r>
-              <a:rPr lang="en-US" dirty="0"/>
+              <a:rPr lang="ar-SA" dirty="0">
+                <a:latin typeface="Amiri" pitchFamily="2" charset="-78"/>
+                <a:ea typeface="Amiri" pitchFamily="2" charset="-78"/>
+                <a:cs typeface="Amiri" pitchFamily="2" charset="-78"/>
+              </a:rPr>
               <a:t>ROLE PLAY B (Core+) — at home.
 SET-UP IN THE BREAKOUT ROOM: A = examiner (reads the left column ONLY — the questions, in order), B = candidate (sees the task column; Core may use the help column), C = observer (ticks the feedback checklist). 1 minute preparation, about 3 minutes speaking, 1 minute feedback, then rotate.
 Task ! is the unexpected question: in the exam the candidate has not seen it — the examiner should read it without warning.
@@ -3156,6 +3200,7 @@
                   <a:srgbClr val="D4AF37"/>
                 </a:solidFill>
                 <a:latin typeface="Amiri" pitchFamily="2" charset="-78"/>
+                <a:ea typeface="Amiri" pitchFamily="2" charset="-78"/>
                 <a:cs typeface="Amiri" pitchFamily="2" charset="-78"/>
               </a:rPr>
               <a:t>م</a:t>
@@ -3362,6 +3407,7 @@
                   <a:srgbClr val="D4AF37"/>
                 </a:solidFill>
                 <a:latin typeface="Amiri" pitchFamily="2" charset="-78"/>
+                <a:ea typeface="Amiri" pitchFamily="2" charset="-78"/>
                 <a:cs typeface="Amiri" pitchFamily="2" charset="-78"/>
               </a:rPr>
               <a:t>وَرْشَةُ التَّحَدُّثِ — حُلُولٌ لِلْبِيئَةِ</a:t>
@@ -3413,6 +3459,7 @@
                   <a:srgbClr val="C6D2E6"/>
                 </a:solidFill>
                 <a:latin typeface="Amiri" pitchFamily="2" charset="-78"/>
+                <a:ea typeface="Amiri" pitchFamily="2" charset="-78"/>
                 <a:cs typeface="Amiri" pitchFamily="2" charset="-78"/>
               </a:rPr>
               <a:t>يَنْبَغِي أَنْ</a:t>
@@ -3439,6 +3486,7 @@
                   <a:srgbClr val="C6D2E6"/>
                 </a:solidFill>
                 <a:latin typeface="Amiri" pitchFamily="2" charset="-78"/>
+                <a:ea typeface="Amiri" pitchFamily="2" charset="-78"/>
                 <a:cs typeface="Amiri" pitchFamily="2" charset="-78"/>
               </a:rPr>
               <a:t>يَجِبُ عَلَى … أَنْ</a:t>
@@ -3465,6 +3513,7 @@
                   <a:srgbClr val="C6D2E6"/>
                 </a:solidFill>
                 <a:latin typeface="Amiri" pitchFamily="2" charset="-78"/>
+                <a:ea typeface="Amiri" pitchFamily="2" charset="-78"/>
                 <a:cs typeface="Amiri" pitchFamily="2" charset="-78"/>
               </a:rPr>
               <a:t>لِكَيْ</a:t>
@@ -3897,6 +3946,7 @@
                   <a:srgbClr val="D4AF37"/>
                 </a:solidFill>
                 <a:latin typeface="Amiri" pitchFamily="2" charset="-78"/>
+                <a:ea typeface="Amiri" pitchFamily="2" charset="-78"/>
                 <a:cs typeface="Amiri" pitchFamily="2" charset="-78"/>
               </a:rPr>
               <a:t>م</a:t>
@@ -4217,6 +4267,7 @@
                   <a:srgbClr val="8A6D1E"/>
                 </a:solidFill>
                 <a:latin typeface="Amiri" pitchFamily="2" charset="-78"/>
+                <a:ea typeface="Amiri" pitchFamily="2" charset="-78"/>
                 <a:cs typeface="Amiri" pitchFamily="2" charset="-78"/>
               </a:rPr>
               <a:t>مَشْرُوعُ إِعَادَةِ التَّدْوِيرِ</a:t>
@@ -4497,6 +4548,7 @@
                   <a:srgbClr val="1B3B6F"/>
                 </a:solidFill>
                 <a:latin typeface="Amiri" pitchFamily="2" charset="-78"/>
+                <a:ea typeface="Amiri" pitchFamily="2" charset="-78"/>
                 <a:cs typeface="Amiri" pitchFamily="2" charset="-78"/>
               </a:rPr>
               <a:t>جَمَعْنَا … وَصَنَعْنَا …</a:t>
@@ -4573,6 +4625,7 @@
                   <a:srgbClr val="1B3B6F"/>
                 </a:solidFill>
                 <a:latin typeface="Amiri" pitchFamily="2" charset="-78"/>
+                <a:ea typeface="Amiri" pitchFamily="2" charset="-78"/>
                 <a:cs typeface="Amiri" pitchFamily="2" charset="-78"/>
               </a:rPr>
               <a:t>حَدِّثْنَا عَنْ مَشْرُوعِكُمْ.</a:t>
@@ -4676,6 +4729,7 @@
                   <a:srgbClr val="1B3B6F"/>
                 </a:solidFill>
                 <a:latin typeface="Amiri" pitchFamily="2" charset="-78"/>
+                <a:ea typeface="Amiri" pitchFamily="2" charset="-78"/>
                 <a:cs typeface="Amiri" pitchFamily="2" charset="-78"/>
               </a:rPr>
               <a:t>جَمَعْنَا … فِي …</a:t>
@@ -4752,6 +4806,7 @@
                   <a:srgbClr val="1B3B6F"/>
                 </a:solidFill>
                 <a:latin typeface="Amiri" pitchFamily="2" charset="-78"/>
+                <a:ea typeface="Amiri" pitchFamily="2" charset="-78"/>
                 <a:cs typeface="Amiri" pitchFamily="2" charset="-78"/>
               </a:rPr>
               <a:t>كَمْ زُجَاجَةً جَمَعْتُمْ؟</a:t>
@@ -4855,6 +4910,7 @@
                   <a:srgbClr val="1B3B6F"/>
                 </a:solidFill>
                 <a:latin typeface="Amiri" pitchFamily="2" charset="-78"/>
+                <a:ea typeface="Amiri" pitchFamily="2" charset="-78"/>
                 <a:cs typeface="Amiri" pitchFamily="2" charset="-78"/>
               </a:rPr>
               <a:t>لِكَيْ … وَلِكَيْ …</a:t>
@@ -4931,6 +4987,7 @@
                   <a:srgbClr val="1B3B6F"/>
                 </a:solidFill>
                 <a:latin typeface="Amiri" pitchFamily="2" charset="-78"/>
+                <a:ea typeface="Amiri" pitchFamily="2" charset="-78"/>
                 <a:cs typeface="Amiri" pitchFamily="2" charset="-78"/>
               </a:rPr>
               <a:t>لِمَاذَا اخْتَرْتُمْ هٰذَا المَشْرُوعَ؟</a:t>
@@ -5034,6 +5091,7 @@
                   <a:srgbClr val="1B3B6F"/>
                 </a:solidFill>
                 <a:latin typeface="Amiri" pitchFamily="2" charset="-78"/>
+                <a:ea typeface="Amiri" pitchFamily="2" charset="-78"/>
                 <a:cs typeface="Amiri" pitchFamily="2" charset="-78"/>
               </a:rPr>
               <a:t>فِي البِدَايَةِ … لٰكِنَّنَا …</a:t>
@@ -5110,6 +5168,7 @@
                   <a:srgbClr val="1B3B6F"/>
                 </a:solidFill>
                 <a:latin typeface="Amiri" pitchFamily="2" charset="-78"/>
+                <a:ea typeface="Amiri" pitchFamily="2" charset="-78"/>
                 <a:cs typeface="Amiri" pitchFamily="2" charset="-78"/>
               </a:rPr>
               <a:t>مَا الصُّعُوبَاتُ الَّتِي وَاجَهْتُمُوهَا؟</a:t>
@@ -5213,6 +5272,7 @@
                   <a:srgbClr val="1B3B6F"/>
                 </a:solidFill>
                 <a:latin typeface="Amiri" pitchFamily="2" charset="-78"/>
+                <a:ea typeface="Amiri" pitchFamily="2" charset="-78"/>
                 <a:cs typeface="Amiri" pitchFamily="2" charset="-78"/>
               </a:rPr>
               <a:t>لَوْ فُزْنَا، لَاشْتَرَيْنَا …</a:t>
@@ -5289,6 +5349,7 @@
                   <a:srgbClr val="1B3B6F"/>
                 </a:solidFill>
                 <a:latin typeface="Amiri" pitchFamily="2" charset="-78"/>
+                <a:ea typeface="Amiri" pitchFamily="2" charset="-78"/>
                 <a:cs typeface="Amiri" pitchFamily="2" charset="-78"/>
               </a:rPr>
               <a:t>لَوْ فُزْتُمْ بِالجَائِزَةِ، مَاذَا تَفْعَلُونَ بِالمَالِ؟</a:t>
@@ -5498,6 +5559,7 @@
                   <a:srgbClr val="D4AF37"/>
                 </a:solidFill>
                 <a:latin typeface="Amiri" pitchFamily="2" charset="-78"/>
+                <a:ea typeface="Amiri" pitchFamily="2" charset="-78"/>
                 <a:cs typeface="Amiri" pitchFamily="2" charset="-78"/>
               </a:rPr>
               <a:t>م</a:t>
@@ -5818,6 +5880,7 @@
                   <a:srgbClr val="8A6D1E"/>
                 </a:solidFill>
                 <a:latin typeface="Amiri" pitchFamily="2" charset="-78"/>
+                <a:ea typeface="Amiri" pitchFamily="2" charset="-78"/>
                 <a:cs typeface="Amiri" pitchFamily="2" charset="-78"/>
               </a:rPr>
               <a:t>مَنْ يَجِبُ أَنْ يَبْدَأَ؟</a:t>
@@ -6098,6 +6161,7 @@
                   <a:srgbClr val="1B3B6F"/>
                 </a:solidFill>
                 <a:latin typeface="Amiri" pitchFamily="2" charset="-78"/>
+                <a:ea typeface="Amiri" pitchFamily="2" charset="-78"/>
                 <a:cs typeface="Amiri" pitchFamily="2" charset="-78"/>
               </a:rPr>
               <a:t>أَرَى أَنَّ … لِأَنَّ …</a:t>
@@ -6174,6 +6238,7 @@
                   <a:srgbClr val="1B3B6F"/>
                 </a:solidFill>
                 <a:latin typeface="Amiri" pitchFamily="2" charset="-78"/>
+                <a:ea typeface="Amiri" pitchFamily="2" charset="-78"/>
                 <a:cs typeface="Amiri" pitchFamily="2" charset="-78"/>
               </a:rPr>
               <a:t>مَنِ المَسْؤُولُ عَنْ حِمَايَةِ البِيئَةِ فِي رَأْيِكَ؟</a:t>
@@ -6277,6 +6342,7 @@
                   <a:srgbClr val="1B3B6F"/>
                 </a:solidFill>
                 <a:latin typeface="Amiri" pitchFamily="2" charset="-78"/>
+                <a:ea typeface="Amiri" pitchFamily="2" charset="-78"/>
                 <a:cs typeface="Amiri" pitchFamily="2" charset="-78"/>
               </a:rPr>
               <a:t>يَجِبُ عَلَيْهَا أَنْ … وَأَنْ …</a:t>
@@ -6353,6 +6419,7 @@
                   <a:srgbClr val="1B3B6F"/>
                 </a:solidFill>
                 <a:latin typeface="Amiri" pitchFamily="2" charset="-78"/>
+                <a:ea typeface="Amiri" pitchFamily="2" charset="-78"/>
                 <a:cs typeface="Amiri" pitchFamily="2" charset="-78"/>
               </a:rPr>
               <a:t>مَاذَا يَجِبُ عَلَى البَلَدِيَّةِ أَنْ تَفْعَلَ؟</a:t>
@@ -6456,6 +6523,7 @@
                   <a:srgbClr val="1B3B6F"/>
                 </a:solidFill>
                 <a:latin typeface="Amiri" pitchFamily="2" charset="-78"/>
+                <a:ea typeface="Amiri" pitchFamily="2" charset="-78"/>
                 <a:cs typeface="Amiri" pitchFamily="2" charset="-78"/>
               </a:rPr>
               <a:t>صَحِيحٌ أَنَّ … غَيْرَ أَنَّ …</a:t>
@@ -6532,6 +6600,7 @@
                   <a:srgbClr val="1B3B6F"/>
                 </a:solidFill>
                 <a:latin typeface="Amiri" pitchFamily="2" charset="-78"/>
+                <a:ea typeface="Amiri" pitchFamily="2" charset="-78"/>
                 <a:cs typeface="Amiri" pitchFamily="2" charset="-78"/>
               </a:rPr>
               <a:t>هٰذَا مُكْلِفٌ جِدًّا!</a:t>
@@ -6635,6 +6704,7 @@
                   <a:srgbClr val="1B3B6F"/>
                 </a:solidFill>
                 <a:latin typeface="Amiri" pitchFamily="2" charset="-78"/>
+                <a:ea typeface="Amiri" pitchFamily="2" charset="-78"/>
                 <a:cs typeface="Amiri" pitchFamily="2" charset="-78"/>
               </a:rPr>
               <a:t>نَعَمْ، فِي … حَيْثُ …</a:t>
@@ -6711,6 +6781,7 @@
                   <a:srgbClr val="1B3B6F"/>
                 </a:solidFill>
                 <a:latin typeface="Amiri" pitchFamily="2" charset="-78"/>
+                <a:ea typeface="Amiri" pitchFamily="2" charset="-78"/>
                 <a:cs typeface="Amiri" pitchFamily="2" charset="-78"/>
               </a:rPr>
               <a:t>هَلْ رَأَيْتَ هٰذِهِ الحُلُولَ تَنْجَحُ فِي مَكَانٍ آخَرَ؟</a:t>
@@ -6814,6 +6885,7 @@
                   <a:srgbClr val="1B3B6F"/>
                 </a:solidFill>
                 <a:latin typeface="Amiri" pitchFamily="2" charset="-78"/>
+                <a:ea typeface="Amiri" pitchFamily="2" charset="-78"/>
                 <a:cs typeface="Amiri" pitchFamily="2" charset="-78"/>
               </a:rPr>
               <a:t>إِذَا لَمْ تُوَافِقْ، فَسَنُطْلِقُ …</a:t>
@@ -6890,6 +6962,7 @@
                   <a:srgbClr val="1B3B6F"/>
                 </a:solidFill>
                 <a:latin typeface="Amiri" pitchFamily="2" charset="-78"/>
+                <a:ea typeface="Amiri" pitchFamily="2" charset="-78"/>
                 <a:cs typeface="Amiri" pitchFamily="2" charset="-78"/>
               </a:rPr>
               <a:t>وَإِذَا لَمْ تُوَافِقِ البَلَدِيَّةُ؟</a:t>
@@ -7099,6 +7172,7 @@
                   <a:srgbClr val="D4AF37"/>
                 </a:solidFill>
                 <a:latin typeface="Amiri" pitchFamily="2" charset="-78"/>
+                <a:ea typeface="Amiri" pitchFamily="2" charset="-78"/>
                 <a:cs typeface="Amiri" pitchFamily="2" charset="-78"/>
               </a:rPr>
               <a:t>م</a:t>
@@ -7419,6 +7493,7 @@
                   <a:srgbClr val="8A6D1E"/>
                 </a:solidFill>
                 <a:latin typeface="Amiri" pitchFamily="2" charset="-78"/>
+                <a:ea typeface="Amiri" pitchFamily="2" charset="-78"/>
                 <a:cs typeface="Amiri" pitchFamily="2" charset="-78"/>
               </a:rPr>
               <a:t>وَرَقَةُ المُلَاحِظِ</a:t>
@@ -8889,6 +8964,7 @@
                   <a:srgbClr val="D4AF37"/>
                 </a:solidFill>
                 <a:latin typeface="Amiri" pitchFamily="2" charset="-78"/>
+                <a:ea typeface="Amiri" pitchFamily="2" charset="-78"/>
                 <a:cs typeface="Amiri" pitchFamily="2" charset="-78"/>
               </a:rPr>
               <a:t>م</a:t>
@@ -9209,6 +9285,7 @@
                   <a:srgbClr val="8A6D1E"/>
                 </a:solidFill>
                 <a:latin typeface="Amiri" pitchFamily="2" charset="-78"/>
+                <a:ea typeface="Amiri" pitchFamily="2" charset="-78"/>
                 <a:cs typeface="Amiri" pitchFamily="2" charset="-78"/>
               </a:rPr>
               <a:t>نَمُوذَجُ الإِجَابَةِ</a:t>
@@ -9451,6 +9528,7 @@
                   <a:srgbClr val="1B3B6F"/>
                 </a:solidFill>
                 <a:latin typeface="Amiri" pitchFamily="2" charset="-78"/>
+                <a:ea typeface="Amiri" pitchFamily="2" charset="-78"/>
                 <a:cs typeface="Amiri" pitchFamily="2" charset="-78"/>
               </a:rPr>
               <a:t>لِأَنِّي أُرِيدُ أَنْ أَحْمِيَ البِيئَةَ.</a:t>
@@ -9527,6 +9605,7 @@
                   <a:srgbClr val="1B3B6F"/>
                 </a:solidFill>
                 <a:latin typeface="Amiri" pitchFamily="2" charset="-78"/>
+                <a:ea typeface="Amiri" pitchFamily="2" charset="-78"/>
                 <a:cs typeface="Amiri" pitchFamily="2" charset="-78"/>
               </a:rPr>
               <a:t>أَهْلًا! لِمَاذَا تُرِيدُ أَنْ تَنْضَمَّ إِلَى النَّادِي؟</a:t>
@@ -9630,6 +9709,7 @@
                   <a:srgbClr val="1B3B6F"/>
                 </a:solidFill>
                 <a:latin typeface="Amiri" pitchFamily="2" charset="-78"/>
+                <a:ea typeface="Amiri" pitchFamily="2" charset="-78"/>
                 <a:cs typeface="Amiri" pitchFamily="2" charset="-78"/>
               </a:rPr>
               <a:t>أُطْفِئُ الأَضْوَاءَ عِنْدَمَا أَخْرُجُ مِنَ الغُرْفَةِ.</a:t>
@@ -9706,6 +9786,7 @@
                   <a:srgbClr val="1B3B6F"/>
                 </a:solidFill>
                 <a:latin typeface="Amiri" pitchFamily="2" charset="-78"/>
+                <a:ea typeface="Amiri" pitchFamily="2" charset="-78"/>
                 <a:cs typeface="Amiri" pitchFamily="2" charset="-78"/>
               </a:rPr>
               <a:t>مَاذَا تَفْعَلُ فِي البَيْتِ لِلْبِيئَةِ؟</a:t>
@@ -9809,6 +9890,7 @@
                   <a:srgbClr val="1B3B6F"/>
                 </a:solidFill>
                 <a:latin typeface="Amiri" pitchFamily="2" charset="-78"/>
+                <a:ea typeface="Amiri" pitchFamily="2" charset="-78"/>
                 <a:cs typeface="Amiri" pitchFamily="2" charset="-78"/>
               </a:rPr>
               <a:t>يَنْبَغِي أَنْ نَضَعَ سَلَّاتٍ لِإِعَادَةِ التَّدْوِيرِ فِي كُلِّ صَفٍّ.</a:t>
@@ -9885,6 +9967,7 @@
                   <a:srgbClr val="1B3B6F"/>
                 </a:solidFill>
                 <a:latin typeface="Amiri" pitchFamily="2" charset="-78"/>
+                <a:ea typeface="Amiri" pitchFamily="2" charset="-78"/>
                 <a:cs typeface="Amiri" pitchFamily="2" charset="-78"/>
               </a:rPr>
               <a:t>مَا فِكْرَتُكَ لِلْمَدْرَسَةِ؟</a:t>
@@ -9988,6 +10071,7 @@
                   <a:srgbClr val="1B3B6F"/>
                 </a:solidFill>
                 <a:latin typeface="Amiri" pitchFamily="2" charset="-78"/>
+                <a:ea typeface="Amiri" pitchFamily="2" charset="-78"/>
                 <a:cs typeface="Amiri" pitchFamily="2" charset="-78"/>
               </a:rPr>
               <a:t>مَتَى وَأَيْنَ نَجْتَمِعُ؟</a:t>
@@ -10064,6 +10148,7 @@
                   <a:srgbClr val="1B3B6F"/>
                 </a:solidFill>
                 <a:latin typeface="Amiri" pitchFamily="2" charset="-78"/>
+                <a:ea typeface="Amiri" pitchFamily="2" charset="-78"/>
                 <a:cs typeface="Amiri" pitchFamily="2" charset="-78"/>
               </a:rPr>
               <a:t>نَجْتَمِعُ كُلَّ أُسْبُوعٍ.</a:t>
@@ -10167,6 +10252,7 @@
                   <a:srgbClr val="1B3B6F"/>
                 </a:solidFill>
                 <a:latin typeface="Amiri" pitchFamily="2" charset="-78"/>
+                <a:ea typeface="Amiri" pitchFamily="2" charset="-78"/>
                 <a:cs typeface="Amiri" pitchFamily="2" charset="-78"/>
               </a:rPr>
               <a:t>نَعَمْ، أَزْرَعُ الطَّمَاطِمَ وَالنَّعْنَاعَ فِي الحَدِيقَةِ.</a:t>
@@ -10243,6 +10329,7 @@
                   <a:srgbClr val="1B3B6F"/>
                 </a:solidFill>
                 <a:latin typeface="Amiri" pitchFamily="2" charset="-78"/>
+                <a:ea typeface="Amiri" pitchFamily="2" charset="-78"/>
                 <a:cs typeface="Amiri" pitchFamily="2" charset="-78"/>
               </a:rPr>
               <a:t>هَلْ تَزْرَعُ شَيْئًا فِي البَيْتِ؟</a:t>
@@ -10452,6 +10539,7 @@
                   <a:srgbClr val="D4AF37"/>
                 </a:solidFill>
                 <a:latin typeface="Amiri" pitchFamily="2" charset="-78"/>
+                <a:ea typeface="Amiri" pitchFamily="2" charset="-78"/>
                 <a:cs typeface="Amiri" pitchFamily="2" charset="-78"/>
               </a:rPr>
               <a:t>م</a:t>
@@ -10772,6 +10860,7 @@
                   <a:srgbClr val="8A6D1E"/>
                 </a:solidFill>
                 <a:latin typeface="Amiri" pitchFamily="2" charset="-78"/>
+                <a:ea typeface="Amiri" pitchFamily="2" charset="-78"/>
                 <a:cs typeface="Amiri" pitchFamily="2" charset="-78"/>
               </a:rPr>
               <a:t>نَمُوذَجُ الإِجَابَةِ</a:t>
@@ -11014,6 +11103,7 @@
                   <a:srgbClr val="1B3B6F"/>
                 </a:solidFill>
                 <a:latin typeface="Amiri" pitchFamily="2" charset="-78"/>
+                <a:ea typeface="Amiri" pitchFamily="2" charset="-78"/>
                 <a:cs typeface="Amiri" pitchFamily="2" charset="-78"/>
               </a:rPr>
               <a:t>يَنْبَغِي أَنْ نُطْفِئَ الأَجْهِزَةَ فِي اللَّيْلِ.</a:t>
@@ -11090,6 +11180,7 @@
                   <a:srgbClr val="1B3B6F"/>
                 </a:solidFill>
                 <a:latin typeface="Amiri" pitchFamily="2" charset="-78"/>
+                <a:ea typeface="Amiri" pitchFamily="2" charset="-78"/>
                 <a:cs typeface="Amiri" pitchFamily="2" charset="-78"/>
               </a:rPr>
               <a:t>فَاتُورَةُ الكَهْرَبَاءِ غَالِيَةٌ جِدًّا هٰذَا الشَّهْرَ!</a:t>
@@ -11193,6 +11284,7 @@
                   <a:srgbClr val="1B3B6F"/>
                 </a:solidFill>
                 <a:latin typeface="Amiri" pitchFamily="2" charset="-78"/>
+                <a:ea typeface="Amiri" pitchFamily="2" charset="-78"/>
                 <a:cs typeface="Amiri" pitchFamily="2" charset="-78"/>
               </a:rPr>
               <a:t>نَسْتَطِيعُ أَنْ نَسْتَحِمَّ فِي خَمْسِ دَقَائِقَ فَقَطْ.</a:t>
@@ -11269,6 +11361,7 @@
                   <a:srgbClr val="1B3B6F"/>
                 </a:solidFill>
                 <a:latin typeface="Amiri" pitchFamily="2" charset="-78"/>
+                <a:ea typeface="Amiri" pitchFamily="2" charset="-78"/>
                 <a:cs typeface="Amiri" pitchFamily="2" charset="-78"/>
               </a:rPr>
               <a:t>وَالمَاءُ؟</a:t>
@@ -11372,6 +11465,7 @@
                   <a:srgbClr val="1B3B6F"/>
                 </a:solidFill>
                 <a:latin typeface="Amiri" pitchFamily="2" charset="-78"/>
+                <a:ea typeface="Amiri" pitchFamily="2" charset="-78"/>
                 <a:cs typeface="Amiri" pitchFamily="2" charset="-78"/>
               </a:rPr>
               <a:t>هَلْ يُمْكِنُ أَنْ نَعْقِدَ اجْتِمَاعًا عَائِلِيًّا يَوْمَ الجُمُعَةِ؟</a:t>
@@ -11448,6 +11542,7 @@
                   <a:srgbClr val="1B3B6F"/>
                 </a:solidFill>
                 <a:latin typeface="Amiri" pitchFamily="2" charset="-78"/>
+                <a:ea typeface="Amiri" pitchFamily="2" charset="-78"/>
                 <a:cs typeface="Amiri" pitchFamily="2" charset="-78"/>
               </a:rPr>
               <a:t>فِكْرَةٌ جَيِّدَةٌ، لٰكِنَّ إِخْوَتَكَ لَا يَسْمَعُونَ!</a:t>
@@ -11551,6 +11646,7 @@
                   <a:srgbClr val="1B3B6F"/>
                 </a:solidFill>
                 <a:latin typeface="Amiri" pitchFamily="2" charset="-78"/>
+                <a:ea typeface="Amiri" pitchFamily="2" charset="-78"/>
                 <a:cs typeface="Amiri" pitchFamily="2" charset="-78"/>
               </a:rPr>
               <a:t>نَسْتَطِيعُ أَنْ نَمْشِيَ إِلَى السُّوقِ، لِكَيْ نُقَلِّلَ مِنَ التَّلَوُّثِ وَنُحَافِظَ عَلَى صِحَّتِنَا.</a:t>
@@ -11627,6 +11723,7 @@
                   <a:srgbClr val="1B3B6F"/>
                 </a:solidFill>
                 <a:latin typeface="Amiri" pitchFamily="2" charset="-78"/>
+                <a:ea typeface="Amiri" pitchFamily="2" charset="-78"/>
                 <a:cs typeface="Amiri" pitchFamily="2" charset="-78"/>
               </a:rPr>
               <a:t>وَمَاذَا عَنِ السَّيَّارَةِ؟ نَسْتَخْدِمُهَا كُلَّ يَوْمٍ.</a:t>
@@ -11730,6 +11827,7 @@
                   <a:srgbClr val="1B3B6F"/>
                 </a:solidFill>
                 <a:latin typeface="Amiri" pitchFamily="2" charset="-78"/>
+                <a:ea typeface="Amiri" pitchFamily="2" charset="-78"/>
                 <a:cs typeface="Amiri" pitchFamily="2" charset="-78"/>
               </a:rPr>
               <a:t>نَعَمْ، سَأَفْرِزُ الوَرَقَ وَالبْلَاسْتِيكَ كُلَّ أُسْبُوعٍ.</a:t>
@@ -11806,6 +11904,7 @@
                   <a:srgbClr val="1B3B6F"/>
                 </a:solidFill>
                 <a:latin typeface="Amiri" pitchFamily="2" charset="-78"/>
+                <a:ea typeface="Amiri" pitchFamily="2" charset="-78"/>
                 <a:cs typeface="Amiri" pitchFamily="2" charset="-78"/>
               </a:rPr>
               <a:t>هَلْ سَتُسَاعِدُ فِي فَرْزِ النُّفَايَاتِ؟</a:t>
@@ -12015,6 +12114,7 @@
                   <a:srgbClr val="D4AF37"/>
                 </a:solidFill>
                 <a:latin typeface="Amiri" pitchFamily="2" charset="-78"/>
+                <a:ea typeface="Amiri" pitchFamily="2" charset="-78"/>
                 <a:cs typeface="Amiri" pitchFamily="2" charset="-78"/>
               </a:rPr>
               <a:t>م</a:t>
@@ -12335,6 +12435,7 @@
                   <a:srgbClr val="8A6D1E"/>
                 </a:solidFill>
                 <a:latin typeface="Amiri" pitchFamily="2" charset="-78"/>
+                <a:ea typeface="Amiri" pitchFamily="2" charset="-78"/>
                 <a:cs typeface="Amiri" pitchFamily="2" charset="-78"/>
               </a:rPr>
               <a:t>نَمُوذَجُ الإِجَابَةِ</a:t>
@@ -12577,6 +12678,7 @@
                   <a:srgbClr val="1B3B6F"/>
                 </a:solidFill>
                 <a:latin typeface="Amiri" pitchFamily="2" charset="-78"/>
+                <a:ea typeface="Amiri" pitchFamily="2" charset="-78"/>
                 <a:cs typeface="Amiri" pitchFamily="2" charset="-78"/>
               </a:rPr>
               <a:t>جَمَعْنَا الزُّجَاجَاتِ البْلَاسْتِيكِيَّةَ مِنَ المَدْرَسَةِ، وَصَنَعْنَا مِنْهَا حَدِيقَةً عَمُودِيَّةً.</a:t>
@@ -12653,6 +12755,7 @@
                   <a:srgbClr val="1B3B6F"/>
                 </a:solidFill>
                 <a:latin typeface="Amiri" pitchFamily="2" charset="-78"/>
+                <a:ea typeface="Amiri" pitchFamily="2" charset="-78"/>
                 <a:cs typeface="Amiri" pitchFamily="2" charset="-78"/>
               </a:rPr>
               <a:t>حَدِّثْنَا عَنْ مَشْرُوعِكُمْ.</a:t>
@@ -12756,6 +12859,7 @@
                   <a:srgbClr val="1B3B6F"/>
                 </a:solidFill>
                 <a:latin typeface="Amiri" pitchFamily="2" charset="-78"/>
+                <a:ea typeface="Amiri" pitchFamily="2" charset="-78"/>
                 <a:cs typeface="Amiri" pitchFamily="2" charset="-78"/>
               </a:rPr>
               <a:t>جَمَعْنَا أَكْثَرَ مِنْ خَمْسِمِئَةِ زُجَاجَةٍ فِي شَهْرٍ وَاحِدٍ.</a:t>
@@ -12832,6 +12936,7 @@
                   <a:srgbClr val="1B3B6F"/>
                 </a:solidFill>
                 <a:latin typeface="Amiri" pitchFamily="2" charset="-78"/>
+                <a:ea typeface="Amiri" pitchFamily="2" charset="-78"/>
                 <a:cs typeface="Amiri" pitchFamily="2" charset="-78"/>
               </a:rPr>
               <a:t>كَمْ زُجَاجَةً جَمَعْتُمْ؟</a:t>
@@ -12935,6 +13040,7 @@
                   <a:srgbClr val="1B3B6F"/>
                 </a:solidFill>
                 <a:latin typeface="Amiri" pitchFamily="2" charset="-78"/>
+                <a:ea typeface="Amiri" pitchFamily="2" charset="-78"/>
                 <a:cs typeface="Amiri" pitchFamily="2" charset="-78"/>
               </a:rPr>
               <a:t>لِكَيْ نُقَلِّلَ النُّفَايَاتِ، وَلِكَيْ نُعَلِّمَ الطُّلَّابَ أَنَّ البْلَاسْتِيكَ لَهُ حَيَاةٌ ثَانِيَةٌ.</a:t>
@@ -13011,6 +13117,7 @@
                   <a:srgbClr val="1B3B6F"/>
                 </a:solidFill>
                 <a:latin typeface="Amiri" pitchFamily="2" charset="-78"/>
+                <a:ea typeface="Amiri" pitchFamily="2" charset="-78"/>
                 <a:cs typeface="Amiri" pitchFamily="2" charset="-78"/>
               </a:rPr>
               <a:t>لِمَاذَا اخْتَرْتُمْ هٰذَا المَشْرُوعَ؟</a:t>
@@ -13114,6 +13221,7 @@
                   <a:srgbClr val="1B3B6F"/>
                 </a:solidFill>
                 <a:latin typeface="Amiri" pitchFamily="2" charset="-78"/>
+                <a:ea typeface="Amiri" pitchFamily="2" charset="-78"/>
                 <a:cs typeface="Amiri" pitchFamily="2" charset="-78"/>
               </a:rPr>
               <a:t>فِي البِدَايَةِ لَمْ يَهْتَمَّ الطُّلَّابُ، لٰكِنَّنَا عَمِلْنَا مُسَابَقَةً بَيْنَ الصُّفُوفِ، فَتَحَمَّسَ الجَمِيعُ.</a:t>
@@ -13190,6 +13298,7 @@
                   <a:srgbClr val="1B3B6F"/>
                 </a:solidFill>
                 <a:latin typeface="Amiri" pitchFamily="2" charset="-78"/>
+                <a:ea typeface="Amiri" pitchFamily="2" charset="-78"/>
                 <a:cs typeface="Amiri" pitchFamily="2" charset="-78"/>
               </a:rPr>
               <a:t>مَا الصُّعُوبَاتُ الَّتِي وَاجَهْتُمُوهَا؟</a:t>
@@ -13293,6 +13402,7 @@
                   <a:srgbClr val="1B3B6F"/>
                 </a:solidFill>
                 <a:latin typeface="Amiri" pitchFamily="2" charset="-78"/>
+                <a:ea typeface="Amiri" pitchFamily="2" charset="-78"/>
                 <a:cs typeface="Amiri" pitchFamily="2" charset="-78"/>
               </a:rPr>
               <a:t>لَوْ فُزْنَا، لَاشْتَرَيْنَا أَلْوَاحًا شَمْسِيَّةً لِسَقْفِ المَدْرَسَةِ.</a:t>
@@ -13369,6 +13479,7 @@
                   <a:srgbClr val="1B3B6F"/>
                 </a:solidFill>
                 <a:latin typeface="Amiri" pitchFamily="2" charset="-78"/>
+                <a:ea typeface="Amiri" pitchFamily="2" charset="-78"/>
                 <a:cs typeface="Amiri" pitchFamily="2" charset="-78"/>
               </a:rPr>
               <a:t>لَوْ فُزْتُمْ بِالجَائِزَةِ، مَاذَا تَفْعَلُونَ بِالمَالِ؟</a:t>
@@ -13578,6 +13689,7 @@
                   <a:srgbClr val="D4AF37"/>
                 </a:solidFill>
                 <a:latin typeface="Amiri" pitchFamily="2" charset="-78"/>
+                <a:ea typeface="Amiri" pitchFamily="2" charset="-78"/>
                 <a:cs typeface="Amiri" pitchFamily="2" charset="-78"/>
               </a:rPr>
               <a:t>م</a:t>
@@ -13898,6 +14010,7 @@
                   <a:srgbClr val="8A6D1E"/>
                 </a:solidFill>
                 <a:latin typeface="Amiri" pitchFamily="2" charset="-78"/>
+                <a:ea typeface="Amiri" pitchFamily="2" charset="-78"/>
                 <a:cs typeface="Amiri" pitchFamily="2" charset="-78"/>
               </a:rPr>
               <a:t>نَمُوذَجُ الإِجَابَةِ</a:t>
@@ -14140,6 +14253,7 @@
                   <a:srgbClr val="1B3B6F"/>
                 </a:solidFill>
                 <a:latin typeface="Amiri" pitchFamily="2" charset="-78"/>
+                <a:ea typeface="Amiri" pitchFamily="2" charset="-78"/>
                 <a:cs typeface="Amiri" pitchFamily="2" charset="-78"/>
               </a:rPr>
               <a:t>أَرَى أَنَّ المَسْؤُولِيَّةَ مُشْتَرَكَةٌ، لِأَنَّ الحُكُومَاتِ تَضَعُ القَوَانِينَ، لٰكِنَّ الأَفْرَادَ هُمُ الَّذِينَ يُطَبِّقُونَهَا.</a:t>
@@ -14216,6 +14330,7 @@
                   <a:srgbClr val="1B3B6F"/>
                 </a:solidFill>
                 <a:latin typeface="Amiri" pitchFamily="2" charset="-78"/>
+                <a:ea typeface="Amiri" pitchFamily="2" charset="-78"/>
                 <a:cs typeface="Amiri" pitchFamily="2" charset="-78"/>
               </a:rPr>
               <a:t>مَنِ المَسْؤُولُ عَنْ حِمَايَةِ البِيئَةِ فِي رَأْيِكَ؟</a:t>
@@ -14319,6 +14434,7 @@
                   <a:srgbClr val="1B3B6F"/>
                 </a:solidFill>
                 <a:latin typeface="Amiri" pitchFamily="2" charset="-78"/>
+                <a:ea typeface="Amiri" pitchFamily="2" charset="-78"/>
                 <a:cs typeface="Amiri" pitchFamily="2" charset="-78"/>
               </a:rPr>
               <a:t>يَجِبُ عَلَيْهَا أَنْ تُخَفِّضَ أَسْعَارَ الحَافِلَاتِ لِلطُّلَّابِ، وَأَنْ تُنْشِئَ مَمَرَّاتٍ آمِنَةً لِلدَّرَّاجَاتِ.</a:t>
@@ -14395,6 +14511,7 @@
                   <a:srgbClr val="1B3B6F"/>
                 </a:solidFill>
                 <a:latin typeface="Amiri" pitchFamily="2" charset="-78"/>
+                <a:ea typeface="Amiri" pitchFamily="2" charset="-78"/>
                 <a:cs typeface="Amiri" pitchFamily="2" charset="-78"/>
               </a:rPr>
               <a:t>مَاذَا يَجِبُ عَلَى البَلَدِيَّةِ أَنْ تَفْعَلَ؟</a:t>
@@ -14498,6 +14615,7 @@
                   <a:srgbClr val="1B3B6F"/>
                 </a:solidFill>
                 <a:latin typeface="Amiri" pitchFamily="2" charset="-78"/>
+                <a:ea typeface="Amiri" pitchFamily="2" charset="-78"/>
                 <a:cs typeface="Amiri" pitchFamily="2" charset="-78"/>
               </a:rPr>
               <a:t>صَحِيحٌ أَنَّهُ مُكْلِفٌ فِي البِدَايَةِ، غَيْرَ أَنَّهُ سَيُوَفِّرُ مَلَايِينَ الجُنَيْهَاتِ مِنْ تَكَالِيفِ العِلَاجِ وَالطُّرُقِ.</a:t>
@@ -14574,6 +14692,7 @@
                   <a:srgbClr val="1B3B6F"/>
                 </a:solidFill>
                 <a:latin typeface="Amiri" pitchFamily="2" charset="-78"/>
+                <a:ea typeface="Amiri" pitchFamily="2" charset="-78"/>
                 <a:cs typeface="Amiri" pitchFamily="2" charset="-78"/>
               </a:rPr>
               <a:t>هٰذَا مُكْلِفٌ جِدًّا!</a:t>
@@ -14677,6 +14796,7 @@
                   <a:srgbClr val="1B3B6F"/>
                 </a:solidFill>
                 <a:latin typeface="Amiri" pitchFamily="2" charset="-78"/>
+                <a:ea typeface="Amiri" pitchFamily="2" charset="-78"/>
                 <a:cs typeface="Amiri" pitchFamily="2" charset="-78"/>
               </a:rPr>
               <a:t>نَعَمْ، فِي أَمْسْتِرْدَامَ حَيْثُ يَذْهَبُ أَكْثَرُ مِنْ نِصْفِ السُّكَّانِ إِلَى العَمَلِ بِالدَّرَّاجَةِ، فَأَصْبَحَ الهَوَاءُ أَنْظَفَ بِكَثِيرٍ.</a:t>
@@ -14753,6 +14873,7 @@
                   <a:srgbClr val="1B3B6F"/>
                 </a:solidFill>
                 <a:latin typeface="Amiri" pitchFamily="2" charset="-78"/>
+                <a:ea typeface="Amiri" pitchFamily="2" charset="-78"/>
                 <a:cs typeface="Amiri" pitchFamily="2" charset="-78"/>
               </a:rPr>
               <a:t>هَلْ رَأَيْتَ هٰذِهِ الحُلُولَ تَنْجَحُ فِي مَكَانٍ آخَرَ؟</a:t>
@@ -14856,6 +14977,7 @@
                   <a:srgbClr val="1B3B6F"/>
                 </a:solidFill>
                 <a:latin typeface="Amiri" pitchFamily="2" charset="-78"/>
+                <a:ea typeface="Amiri" pitchFamily="2" charset="-78"/>
                 <a:cs typeface="Amiri" pitchFamily="2" charset="-78"/>
               </a:rPr>
               <a:t>إِذَا لَمْ تُوَافِقْ، فَسَنُطْلِقُ حَمْلَةَ تَوْقِيعَاتٍ، وَسَنَكْتُبُ إِلَى الصُّحُفِ المَحَلِّيَّةِ.</a:t>
@@ -14932,6 +15054,7 @@
                   <a:srgbClr val="1B3B6F"/>
                 </a:solidFill>
                 <a:latin typeface="Amiri" pitchFamily="2" charset="-78"/>
+                <a:ea typeface="Amiri" pitchFamily="2" charset="-78"/>
                 <a:cs typeface="Amiri" pitchFamily="2" charset="-78"/>
               </a:rPr>
               <a:t>وَإِذَا لَمْ تُوَافِقِ البَلَدِيَّةُ؟</a:t>
@@ -15141,6 +15264,7 @@
                   <a:srgbClr val="D4AF37"/>
                 </a:solidFill>
                 <a:latin typeface="Amiri" pitchFamily="2" charset="-78"/>
+                <a:ea typeface="Amiri" pitchFamily="2" charset="-78"/>
                 <a:cs typeface="Amiri" pitchFamily="2" charset="-78"/>
               </a:rPr>
               <a:t>م</a:t>
@@ -15461,6 +15585,7 @@
                   <a:srgbClr val="8A6D1E"/>
                 </a:solidFill>
                 <a:latin typeface="Amiri" pitchFamily="2" charset="-78"/>
+                <a:ea typeface="Amiri" pitchFamily="2" charset="-78"/>
                 <a:cs typeface="Amiri" pitchFamily="2" charset="-78"/>
               </a:rPr>
               <a:t>أَنَا وَالبِيئَةُ</a:t>
@@ -15741,6 +15866,7 @@
                   <a:srgbClr val="1B3B6F"/>
                 </a:solidFill>
                 <a:latin typeface="Amiri" pitchFamily="2" charset="-78"/>
+                <a:ea typeface="Amiri" pitchFamily="2" charset="-78"/>
                 <a:cs typeface="Amiri" pitchFamily="2" charset="-78"/>
               </a:rPr>
               <a:t>نَعَمْ، نُعِيدُ تَدْوِيرَ …</a:t>
@@ -15817,6 +15943,7 @@
                   <a:srgbClr val="1B3B6F"/>
                 </a:solidFill>
                 <a:latin typeface="Amiri" pitchFamily="2" charset="-78"/>
+                <a:ea typeface="Amiri" pitchFamily="2" charset="-78"/>
                 <a:cs typeface="Amiri" pitchFamily="2" charset="-78"/>
               </a:rPr>
               <a:t>هَلْ تُعِيدُ التَّدْوِيرَ فِي البَيْتِ؟</a:t>
@@ -15985,6 +16112,7 @@
                   <a:srgbClr val="1B3B6F"/>
                 </a:solidFill>
                 <a:latin typeface="Amiri" pitchFamily="2" charset="-78"/>
+                <a:ea typeface="Amiri" pitchFamily="2" charset="-78"/>
                 <a:cs typeface="Amiri" pitchFamily="2" charset="-78"/>
               </a:rPr>
               <a:t>أُغْلِقُ … عِنْدَمَا …</a:t>
@@ -16061,6 +16189,7 @@
                   <a:srgbClr val="1B3B6F"/>
                 </a:solidFill>
                 <a:latin typeface="Amiri" pitchFamily="2" charset="-78"/>
+                <a:ea typeface="Amiri" pitchFamily="2" charset="-78"/>
                 <a:cs typeface="Amiri" pitchFamily="2" charset="-78"/>
               </a:rPr>
               <a:t>كَيْفَ تُوَفِّرُ المَاءَ؟</a:t>
@@ -16229,6 +16358,7 @@
                   <a:srgbClr val="1B3B6F"/>
                 </a:solidFill>
                 <a:latin typeface="Amiri" pitchFamily="2" charset="-78"/>
+                <a:ea typeface="Amiri" pitchFamily="2" charset="-78"/>
                 <a:cs typeface="Amiri" pitchFamily="2" charset="-78"/>
               </a:rPr>
               <a:t>أَذْهَبُ … بِالحَافِلَةِ / مَشْيًا</a:t>
@@ -16305,6 +16435,7 @@
                   <a:srgbClr val="1B3B6F"/>
                 </a:solidFill>
                 <a:latin typeface="Amiri" pitchFamily="2" charset="-78"/>
+                <a:ea typeface="Amiri" pitchFamily="2" charset="-78"/>
                 <a:cs typeface="Amiri" pitchFamily="2" charset="-78"/>
               </a:rPr>
               <a:t>كَيْفَ تَذْهَبُ إِلَى المَدْرَسَةِ؟</a:t>
@@ -16473,6 +16604,7 @@
                   <a:srgbClr val="1B3B6F"/>
                 </a:solidFill>
                 <a:latin typeface="Amiri" pitchFamily="2" charset="-78"/>
+                <a:ea typeface="Amiri" pitchFamily="2" charset="-78"/>
                 <a:cs typeface="Amiri" pitchFamily="2" charset="-78"/>
               </a:rPr>
               <a:t>يَنْبَغِي أَنْ …</a:t>
@@ -16549,6 +16681,7 @@
                   <a:srgbClr val="1B3B6F"/>
                 </a:solidFill>
                 <a:latin typeface="Amiri" pitchFamily="2" charset="-78"/>
+                <a:ea typeface="Amiri" pitchFamily="2" charset="-78"/>
                 <a:cs typeface="Amiri" pitchFamily="2" charset="-78"/>
               </a:rPr>
               <a:t>مَاذَا يَنْبَغِي أَنْ نَفْعَلَ لِلْبِيئَةِ؟</a:t>
@@ -16717,6 +16850,7 @@
                   <a:srgbClr val="1B3B6F"/>
                 </a:solidFill>
                 <a:latin typeface="Amiri" pitchFamily="2" charset="-78"/>
+                <a:ea typeface="Amiri" pitchFamily="2" charset="-78"/>
                 <a:cs typeface="Amiri" pitchFamily="2" charset="-78"/>
               </a:rPr>
               <a:t>لَا، أَسْتَخْدِمُ …</a:t>
@@ -16793,6 +16927,7 @@
                   <a:srgbClr val="1B3B6F"/>
                 </a:solidFill>
                 <a:latin typeface="Amiri" pitchFamily="2" charset="-78"/>
+                <a:ea typeface="Amiri" pitchFamily="2" charset="-78"/>
                 <a:cs typeface="Amiri" pitchFamily="2" charset="-78"/>
               </a:rPr>
               <a:t>هَلْ تَسْتَخْدِمُ أَكْيَاسَ البْلَاسْتِيكِ؟</a:t>
@@ -16947,6 +17082,7 @@
                   <a:srgbClr val="1B3B6F"/>
                 </a:solidFill>
                 <a:latin typeface="Amiri" pitchFamily="2" charset="-78"/>
+                <a:ea typeface="Amiri" pitchFamily="2" charset="-78"/>
                 <a:cs typeface="Amiri" pitchFamily="2" charset="-78"/>
               </a:rPr>
               <a:t>عَفْوًا، هَلْ يُمْكِنُ أَنْ تُعِيدَ السُّؤَالَ؟</a:t>
@@ -17080,6 +17216,7 @@
                   <a:srgbClr val="D4AF37"/>
                 </a:solidFill>
                 <a:latin typeface="Amiri" pitchFamily="2" charset="-78"/>
+                <a:ea typeface="Amiri" pitchFamily="2" charset="-78"/>
                 <a:cs typeface="Amiri" pitchFamily="2" charset="-78"/>
               </a:rPr>
               <a:t>م</a:t>
@@ -17400,6 +17537,7 @@
                   <a:srgbClr val="8A6D1E"/>
                 </a:solidFill>
                 <a:latin typeface="Amiri" pitchFamily="2" charset="-78"/>
+                <a:ea typeface="Amiri" pitchFamily="2" charset="-78"/>
                 <a:cs typeface="Amiri" pitchFamily="2" charset="-78"/>
               </a:rPr>
               <a:t>حُلُولٌ عَمَلِيَّةٌ</a:t>
@@ -17680,6 +17818,7 @@
                   <a:srgbClr val="1B3B6F"/>
                 </a:solidFill>
                 <a:latin typeface="Amiri" pitchFamily="2" charset="-78"/>
+                <a:ea typeface="Amiri" pitchFamily="2" charset="-78"/>
                 <a:cs typeface="Amiri" pitchFamily="2" charset="-78"/>
               </a:rPr>
               <a:t>تُنَظِّمُ مَدْرَسَتِي … وَ…</a:t>
@@ -17756,6 +17895,7 @@
                   <a:srgbClr val="1B3B6F"/>
                 </a:solidFill>
                 <a:latin typeface="Amiri" pitchFamily="2" charset="-78"/>
+                <a:ea typeface="Amiri" pitchFamily="2" charset="-78"/>
                 <a:cs typeface="Amiri" pitchFamily="2" charset="-78"/>
               </a:rPr>
               <a:t>مَاذَا تَفْعَلُ مَدْرَسَتُكَ لِحِمَايَةِ البِيئَةِ؟</a:t>
@@ -17859,6 +17999,7 @@
                   <a:srgbClr val="1B3B6F"/>
                 </a:solidFill>
                 <a:latin typeface="Amiri" pitchFamily="2" charset="-78"/>
+                <a:ea typeface="Amiri" pitchFamily="2" charset="-78"/>
                 <a:cs typeface="Amiri" pitchFamily="2" charset="-78"/>
               </a:rPr>
               <a:t>كُنْتُ … أَمَّا الآنَ فَأَحْمِلُ …</a:t>
@@ -17935,6 +18076,7 @@
                   <a:srgbClr val="1B3B6F"/>
                 </a:solidFill>
                 <a:latin typeface="Amiri" pitchFamily="2" charset="-78"/>
+                <a:ea typeface="Amiri" pitchFamily="2" charset="-78"/>
                 <a:cs typeface="Amiri" pitchFamily="2" charset="-78"/>
               </a:rPr>
               <a:t>مَا الَّذِي غَيَّرْتَهُ فِي عَادَاتِكَ لِلْبِيئَةِ؟</a:t>
@@ -18038,6 +18180,7 @@
                   <a:srgbClr val="1B3B6F"/>
                 </a:solidFill>
                 <a:latin typeface="Amiri" pitchFamily="2" charset="-78"/>
+                <a:ea typeface="Amiri" pitchFamily="2" charset="-78"/>
                 <a:cs typeface="Amiri" pitchFamily="2" charset="-78"/>
               </a:rPr>
               <a:t>لِكَيْ نُقَلِّلَ … وَ…</a:t>
@@ -18114,6 +18257,7 @@
                   <a:srgbClr val="1B3B6F"/>
                 </a:solidFill>
                 <a:latin typeface="Amiri" pitchFamily="2" charset="-78"/>
+                <a:ea typeface="Amiri" pitchFamily="2" charset="-78"/>
                 <a:cs typeface="Amiri" pitchFamily="2" charset="-78"/>
               </a:rPr>
               <a:t>لِمَاذَا يَنْبَغِي أَنْ نَسْتَخْدِمَ المُوَاصَلَاتِ العَامَّةَ؟</a:t>
@@ -18217,6 +18361,7 @@
                   <a:srgbClr val="1B3B6F"/>
                 </a:solidFill>
                 <a:latin typeface="Amiri" pitchFamily="2" charset="-78"/>
+                <a:ea typeface="Amiri" pitchFamily="2" charset="-78"/>
                 <a:cs typeface="Amiri" pitchFamily="2" charset="-78"/>
               </a:rPr>
               <a:t>نَعَمْ، شَارَكْتُ فِي … حَيْثُ …</a:t>
@@ -18293,6 +18438,7 @@
                   <a:srgbClr val="1B3B6F"/>
                 </a:solidFill>
                 <a:latin typeface="Amiri" pitchFamily="2" charset="-78"/>
+                <a:ea typeface="Amiri" pitchFamily="2" charset="-78"/>
                 <a:cs typeface="Amiri" pitchFamily="2" charset="-78"/>
               </a:rPr>
               <a:t>هَلْ شَارَكْتَ فِي حَمْلَةٍ بِيئِيَّةٍ؟</a:t>
@@ -18396,6 +18542,7 @@
                   <a:srgbClr val="1B3B6F"/>
                 </a:solidFill>
                 <a:latin typeface="Amiri" pitchFamily="2" charset="-78"/>
+                <a:ea typeface="Amiri" pitchFamily="2" charset="-78"/>
                 <a:cs typeface="Amiri" pitchFamily="2" charset="-78"/>
               </a:rPr>
               <a:t>إِذَا أَطْفَأْنَا …، فَسَنُوَفِّرُ …</a:t>
@@ -18472,6 +18619,7 @@
                   <a:srgbClr val="1B3B6F"/>
                 </a:solidFill>
                 <a:latin typeface="Amiri" pitchFamily="2" charset="-78"/>
+                <a:ea typeface="Amiri" pitchFamily="2" charset="-78"/>
                 <a:cs typeface="Amiri" pitchFamily="2" charset="-78"/>
               </a:rPr>
               <a:t>إِذَا أَطْفَأْنَا الأَجْهِزَةَ، مَاذَا يَحْدُثُ؟</a:t>
@@ -18681,6 +18829,7 @@
                   <a:srgbClr val="D4AF37"/>
                 </a:solidFill>
                 <a:latin typeface="Amiri" pitchFamily="2" charset="-78"/>
+                <a:ea typeface="Amiri" pitchFamily="2" charset="-78"/>
                 <a:cs typeface="Amiri" pitchFamily="2" charset="-78"/>
               </a:rPr>
               <a:t>م</a:t>
@@ -19001,6 +19150,7 @@
                   <a:srgbClr val="8A6D1E"/>
                 </a:solidFill>
                 <a:latin typeface="Amiri" pitchFamily="2" charset="-78"/>
+                <a:ea typeface="Amiri" pitchFamily="2" charset="-78"/>
                 <a:cs typeface="Amiri" pitchFamily="2" charset="-78"/>
               </a:rPr>
               <a:t>مَسْؤُولِيَّةُ مَنْ؟</a:t>
@@ -19281,6 +19431,7 @@
                   <a:srgbClr val="1B3B6F"/>
                 </a:solidFill>
                 <a:latin typeface="Amiri" pitchFamily="2" charset="-78"/>
+                <a:ea typeface="Amiri" pitchFamily="2" charset="-78"/>
                 <a:cs typeface="Amiri" pitchFamily="2" charset="-78"/>
               </a:rPr>
               <a:t>أَرَى أَنَّهُ يَجِبُ … لِأَنَّ …</a:t>
@@ -19357,6 +19508,7 @@
                   <a:srgbClr val="1B3B6F"/>
                 </a:solidFill>
                 <a:latin typeface="Amiri" pitchFamily="2" charset="-78"/>
+                <a:ea typeface="Amiri" pitchFamily="2" charset="-78"/>
                 <a:cs typeface="Amiri" pitchFamily="2" charset="-78"/>
               </a:rPr>
               <a:t>هَلْ يَجِبُ عَلَى الحُكُومَةِ أَنْ تَمْنَعَ أَكْيَاسَ البْلَاسْتِيكِ؟</a:t>
@@ -19460,6 +19612,7 @@
                   <a:srgbClr val="1B3B6F"/>
                 </a:solidFill>
                 <a:latin typeface="Amiri" pitchFamily="2" charset="-78"/>
+                <a:ea typeface="Amiri" pitchFamily="2" charset="-78"/>
                 <a:cs typeface="Amiri" pitchFamily="2" charset="-78"/>
               </a:rPr>
               <a:t>صَحِيحٌ أَنَّ … غَيْرَ أَنَّ …</a:t>
@@ -19536,6 +19689,7 @@
                   <a:srgbClr val="1B3B6F"/>
                 </a:solidFill>
                 <a:latin typeface="Amiri" pitchFamily="2" charset="-78"/>
+                <a:ea typeface="Amiri" pitchFamily="2" charset="-78"/>
                 <a:cs typeface="Amiri" pitchFamily="2" charset="-78"/>
               </a:rPr>
               <a:t>هَلْ يَسْتَطِيعُ فَرْدٌ وَاحِدٌ أَنْ يُغَيِّرَ شَيْئًا؟</a:t>
@@ -19639,6 +19793,7 @@
                   <a:srgbClr val="1B3B6F"/>
                 </a:solidFill>
                 <a:latin typeface="Amiri" pitchFamily="2" charset="-78"/>
+                <a:ea typeface="Amiri" pitchFamily="2" charset="-78"/>
                 <a:cs typeface="Amiri" pitchFamily="2" charset="-78"/>
               </a:rPr>
               <a:t>مِنْ نَاحِيَةٍ … وَمِنْ نَاحِيَةٍ أُخْرَى …</a:t>
@@ -19715,6 +19870,7 @@
                   <a:srgbClr val="1B3B6F"/>
                 </a:solidFill>
                 <a:latin typeface="Amiri" pitchFamily="2" charset="-78"/>
+                <a:ea typeface="Amiri" pitchFamily="2" charset="-78"/>
                 <a:cs typeface="Amiri" pitchFamily="2" charset="-78"/>
               </a:rPr>
               <a:t>مَا رَأْيُكَ فِي السَّيَّارَاتِ الكَهْرَبَائِيَّةِ؟</a:t>
@@ -19818,6 +19974,7 @@
                   <a:srgbClr val="1B3B6F"/>
                 </a:solidFill>
                 <a:latin typeface="Amiri" pitchFamily="2" charset="-78"/>
+                <a:ea typeface="Amiri" pitchFamily="2" charset="-78"/>
                 <a:cs typeface="Amiri" pitchFamily="2" charset="-78"/>
               </a:rPr>
               <a:t>يُمْكِنُ أَنْ … لِكَيْ …</a:t>
@@ -19894,6 +20051,7 @@
                   <a:srgbClr val="1B3B6F"/>
                 </a:solidFill>
                 <a:latin typeface="Amiri" pitchFamily="2" charset="-78"/>
+                <a:ea typeface="Amiri" pitchFamily="2" charset="-78"/>
                 <a:cs typeface="Amiri" pitchFamily="2" charset="-78"/>
               </a:rPr>
               <a:t>كَيْفَ يُمْكِنُ أَنْ نُقْنِعَ الكِبَارَ بِتَغْيِيرِ عَادَاتِهِمْ؟</a:t>
@@ -19997,6 +20155,7 @@
                   <a:srgbClr val="1B3B6F"/>
                 </a:solidFill>
                 <a:latin typeface="Amiri" pitchFamily="2" charset="-78"/>
+                <a:ea typeface="Amiri" pitchFamily="2" charset="-78"/>
                 <a:cs typeface="Amiri" pitchFamily="2" charset="-78"/>
               </a:rPr>
               <a:t>لَوْ كُنْتُ وَزِيرًا، لَجَعَلْتُ …</a:t>
@@ -20073,6 +20232,7 @@
                   <a:srgbClr val="1B3B6F"/>
                 </a:solidFill>
                 <a:latin typeface="Amiri" pitchFamily="2" charset="-78"/>
+                <a:ea typeface="Amiri" pitchFamily="2" charset="-78"/>
                 <a:cs typeface="Amiri" pitchFamily="2" charset="-78"/>
               </a:rPr>
               <a:t>لَوْ كُنْتَ وَزِيرًا لِلْبِيئَةِ، مَاذَا تَفْعَلُ أَوَّلًا؟</a:t>
@@ -20282,6 +20442,7 @@
                   <a:srgbClr val="D4AF37"/>
                 </a:solidFill>
                 <a:latin typeface="Amiri" pitchFamily="2" charset="-78"/>
+                <a:ea typeface="Amiri" pitchFamily="2" charset="-78"/>
                 <a:cs typeface="Amiri" pitchFamily="2" charset="-78"/>
               </a:rPr>
               <a:t>م</a:t>
@@ -20602,6 +20763,7 @@
                   <a:srgbClr val="8A6D1E"/>
                 </a:solidFill>
                 <a:latin typeface="Amiri" pitchFamily="2" charset="-78"/>
+                <a:ea typeface="Amiri" pitchFamily="2" charset="-78"/>
                 <a:cs typeface="Amiri" pitchFamily="2" charset="-78"/>
               </a:rPr>
               <a:t>آدَابُ الصَّفِّ</a:t>
@@ -22133,6 +22295,7 @@
                   <a:srgbClr val="D4AF37"/>
                 </a:solidFill>
                 <a:latin typeface="Amiri" pitchFamily="2" charset="-78"/>
+                <a:ea typeface="Amiri" pitchFamily="2" charset="-78"/>
                 <a:cs typeface="Amiri" pitchFamily="2" charset="-78"/>
               </a:rPr>
               <a:t>م</a:t>
@@ -22453,6 +22616,7 @@
                   <a:srgbClr val="8A6D1E"/>
                 </a:solidFill>
                 <a:latin typeface="Amiri" pitchFamily="2" charset="-78"/>
+                <a:ea typeface="Amiri" pitchFamily="2" charset="-78"/>
                 <a:cs typeface="Amiri" pitchFamily="2" charset="-78"/>
               </a:rPr>
               <a:t>نَمُوذَجُ الإِجَابَةِ</a:t>
@@ -22695,6 +22859,7 @@
                   <a:srgbClr val="1B3B6F"/>
                 </a:solidFill>
                 <a:latin typeface="Amiri" pitchFamily="2" charset="-78"/>
+                <a:ea typeface="Amiri" pitchFamily="2" charset="-78"/>
                 <a:cs typeface="Amiri" pitchFamily="2" charset="-78"/>
               </a:rPr>
               <a:t>نَعَمْ، نُعِيدُ تَدْوِيرَ الوَرَقِ وَالبْلَاسْتِيكِ.</a:t>
@@ -22771,6 +22936,7 @@
                   <a:srgbClr val="1B3B6F"/>
                 </a:solidFill>
                 <a:latin typeface="Amiri" pitchFamily="2" charset="-78"/>
+                <a:ea typeface="Amiri" pitchFamily="2" charset="-78"/>
                 <a:cs typeface="Amiri" pitchFamily="2" charset="-78"/>
               </a:rPr>
               <a:t>هَلْ تُعِيدُ التَّدْوِيرَ فِي البَيْتِ؟</a:t>
@@ -22874,6 +23040,7 @@
                   <a:srgbClr val="1B3B6F"/>
                 </a:solidFill>
                 <a:latin typeface="Amiri" pitchFamily="2" charset="-78"/>
+                <a:ea typeface="Amiri" pitchFamily="2" charset="-78"/>
                 <a:cs typeface="Amiri" pitchFamily="2" charset="-78"/>
               </a:rPr>
               <a:t>أُغْلِقُ الحَنَفِيَّةَ عِنْدَمَا أُنَظِّفُ أَسْنَانِي.</a:t>
@@ -22950,6 +23117,7 @@
                   <a:srgbClr val="1B3B6F"/>
                 </a:solidFill>
                 <a:latin typeface="Amiri" pitchFamily="2" charset="-78"/>
+                <a:ea typeface="Amiri" pitchFamily="2" charset="-78"/>
                 <a:cs typeface="Amiri" pitchFamily="2" charset="-78"/>
               </a:rPr>
               <a:t>كَيْفَ تُوَفِّرُ المَاءَ؟</a:t>
@@ -23053,6 +23221,7 @@
                   <a:srgbClr val="1B3B6F"/>
                 </a:solidFill>
                 <a:latin typeface="Amiri" pitchFamily="2" charset="-78"/>
+                <a:ea typeface="Amiri" pitchFamily="2" charset="-78"/>
                 <a:cs typeface="Amiri" pitchFamily="2" charset="-78"/>
               </a:rPr>
               <a:t>أَذْهَبُ إِلَى المَدْرَسَةِ بِالحَافِلَةِ.</a:t>
@@ -23129,6 +23298,7 @@
                   <a:srgbClr val="1B3B6F"/>
                 </a:solidFill>
                 <a:latin typeface="Amiri" pitchFamily="2" charset="-78"/>
+                <a:ea typeface="Amiri" pitchFamily="2" charset="-78"/>
                 <a:cs typeface="Amiri" pitchFamily="2" charset="-78"/>
               </a:rPr>
               <a:t>كَيْفَ تَذْهَبُ إِلَى المَدْرَسَةِ؟</a:t>
@@ -23232,6 +23402,7 @@
                   <a:srgbClr val="1B3B6F"/>
                 </a:solidFill>
                 <a:latin typeface="Amiri" pitchFamily="2" charset="-78"/>
+                <a:ea typeface="Amiri" pitchFamily="2" charset="-78"/>
                 <a:cs typeface="Amiri" pitchFamily="2" charset="-78"/>
               </a:rPr>
               <a:t>يَنْبَغِي أَنْ نَزْرَعَ أَشْجَارًا كَثِيرَةً.</a:t>
@@ -23308,6 +23479,7 @@
                   <a:srgbClr val="1B3B6F"/>
                 </a:solidFill>
                 <a:latin typeface="Amiri" pitchFamily="2" charset="-78"/>
+                <a:ea typeface="Amiri" pitchFamily="2" charset="-78"/>
                 <a:cs typeface="Amiri" pitchFamily="2" charset="-78"/>
               </a:rPr>
               <a:t>مَاذَا يَنْبَغِي أَنْ نَفْعَلَ لِلْبِيئَةِ؟</a:t>
@@ -23411,6 +23583,7 @@
                   <a:srgbClr val="1B3B6F"/>
                 </a:solidFill>
                 <a:latin typeface="Amiri" pitchFamily="2" charset="-78"/>
+                <a:ea typeface="Amiri" pitchFamily="2" charset="-78"/>
                 <a:cs typeface="Amiri" pitchFamily="2" charset="-78"/>
               </a:rPr>
               <a:t>لَا، أَسْتَخْدِمُ حَقِيبَةً مِنَ القُمَاشِ.</a:t>
@@ -23487,6 +23660,7 @@
                   <a:srgbClr val="1B3B6F"/>
                 </a:solidFill>
                 <a:latin typeface="Amiri" pitchFamily="2" charset="-78"/>
+                <a:ea typeface="Amiri" pitchFamily="2" charset="-78"/>
                 <a:cs typeface="Amiri" pitchFamily="2" charset="-78"/>
               </a:rPr>
               <a:t>هَلْ تَسْتَخْدِمُ أَكْيَاسَ البْلَاسْتِيكِ؟</a:t>
@@ -23696,6 +23870,7 @@
                   <a:srgbClr val="D4AF37"/>
                 </a:solidFill>
                 <a:latin typeface="Amiri" pitchFamily="2" charset="-78"/>
+                <a:ea typeface="Amiri" pitchFamily="2" charset="-78"/>
                 <a:cs typeface="Amiri" pitchFamily="2" charset="-78"/>
               </a:rPr>
               <a:t>م</a:t>
@@ -24016,6 +24191,7 @@
                   <a:srgbClr val="8A6D1E"/>
                 </a:solidFill>
                 <a:latin typeface="Amiri" pitchFamily="2" charset="-78"/>
+                <a:ea typeface="Amiri" pitchFamily="2" charset="-78"/>
                 <a:cs typeface="Amiri" pitchFamily="2" charset="-78"/>
               </a:rPr>
               <a:t>نَمُوذَجُ الإِجَابَةِ</a:t>
@@ -24258,6 +24434,7 @@
                   <a:srgbClr val="1B3B6F"/>
                 </a:solidFill>
                 <a:latin typeface="Amiri" pitchFamily="2" charset="-78"/>
+                <a:ea typeface="Amiri" pitchFamily="2" charset="-78"/>
                 <a:cs typeface="Amiri" pitchFamily="2" charset="-78"/>
               </a:rPr>
               <a:t>تُنَظِّمُ مَدْرَسَتِي يَوْمًا لِلتَّنْظِيفِ كُلَّ شَهْرٍ، وَعِنْدَنَا أَلْوَاحٌ شَمْسِيَّةٌ عَلَى السَّقْفِ.</a:t>
@@ -24334,6 +24511,7 @@
                   <a:srgbClr val="1B3B6F"/>
                 </a:solidFill>
                 <a:latin typeface="Amiri" pitchFamily="2" charset="-78"/>
+                <a:ea typeface="Amiri" pitchFamily="2" charset="-78"/>
                 <a:cs typeface="Amiri" pitchFamily="2" charset="-78"/>
               </a:rPr>
               <a:t>مَاذَا تَفْعَلُ مَدْرَسَتُكَ لِحِمَايَةِ البِيئَةِ؟</a:t>
@@ -24437,6 +24615,7 @@
                   <a:srgbClr val="1B3B6F"/>
                 </a:solidFill>
                 <a:latin typeface="Amiri" pitchFamily="2" charset="-78"/>
+                <a:ea typeface="Amiri" pitchFamily="2" charset="-78"/>
                 <a:cs typeface="Amiri" pitchFamily="2" charset="-78"/>
               </a:rPr>
               <a:t>كُنْتُ أَشْتَرِي زُجَاجَةَ مَاءٍ كُلَّ يَوْمٍ، أَمَّا الآنَ فَأَحْمِلُ زُجَاجَتِي الخَاصَّةَ.</a:t>
@@ -24513,6 +24692,7 @@
                   <a:srgbClr val="1B3B6F"/>
                 </a:solidFill>
                 <a:latin typeface="Amiri" pitchFamily="2" charset="-78"/>
+                <a:ea typeface="Amiri" pitchFamily="2" charset="-78"/>
                 <a:cs typeface="Amiri" pitchFamily="2" charset="-78"/>
               </a:rPr>
               <a:t>مَا الَّذِي غَيَّرْتَهُ فِي عَادَاتِكَ لِلْبِيئَةِ؟</a:t>
@@ -24616,6 +24796,7 @@
                   <a:srgbClr val="1B3B6F"/>
                 </a:solidFill>
                 <a:latin typeface="Amiri" pitchFamily="2" charset="-78"/>
+                <a:ea typeface="Amiri" pitchFamily="2" charset="-78"/>
                 <a:cs typeface="Amiri" pitchFamily="2" charset="-78"/>
               </a:rPr>
               <a:t>لِكَيْ نُقَلِّلَ مِنْ زَحْمَةِ المُرُورِ وَالتَّلَوُّثِ، وَلِأَنَّهَا أَرْخَصُ مِنَ السَّيَّارَةِ.</a:t>
@@ -24692,6 +24873,7 @@
                   <a:srgbClr val="1B3B6F"/>
                 </a:solidFill>
                 <a:latin typeface="Amiri" pitchFamily="2" charset="-78"/>
+                <a:ea typeface="Amiri" pitchFamily="2" charset="-78"/>
                 <a:cs typeface="Amiri" pitchFamily="2" charset="-78"/>
               </a:rPr>
               <a:t>لِمَاذَا يَنْبَغِي أَنْ نَسْتَخْدِمَ المُوَاصَلَاتِ العَامَّةَ؟</a:t>
@@ -24795,6 +24977,7 @@
                   <a:srgbClr val="1B3B6F"/>
                 </a:solidFill>
                 <a:latin typeface="Amiri" pitchFamily="2" charset="-78"/>
+                <a:ea typeface="Amiri" pitchFamily="2" charset="-78"/>
                 <a:cs typeface="Amiri" pitchFamily="2" charset="-78"/>
               </a:rPr>
               <a:t>نَعَمْ، شَارَكْتُ فِي حَمْلَةٍ لِزِرَاعَةِ الأَشْجَارِ، حَيْثُ زَرَعْنَا خَمْسِينَ شَجَرَةً فِي يَوْمٍ وَاحِدٍ.</a:t>
@@ -24871,6 +25054,7 @@
                   <a:srgbClr val="1B3B6F"/>
                 </a:solidFill>
                 <a:latin typeface="Amiri" pitchFamily="2" charset="-78"/>
+                <a:ea typeface="Amiri" pitchFamily="2" charset="-78"/>
                 <a:cs typeface="Amiri" pitchFamily="2" charset="-78"/>
               </a:rPr>
               <a:t>هَلْ شَارَكْتَ فِي حَمْلَةٍ بِيئِيَّةٍ؟</a:t>
@@ -24974,6 +25158,7 @@
                   <a:srgbClr val="1B3B6F"/>
                 </a:solidFill>
                 <a:latin typeface="Amiri" pitchFamily="2" charset="-78"/>
+                <a:ea typeface="Amiri" pitchFamily="2" charset="-78"/>
                 <a:cs typeface="Amiri" pitchFamily="2" charset="-78"/>
               </a:rPr>
               <a:t>إِذَا أَطْفَأْنَا الأَجْهِزَةَ، فَسَنُوَفِّرُ الطَّاقَةَ وَالمَالَ مَعًا.</a:t>
@@ -25050,6 +25235,7 @@
                   <a:srgbClr val="1B3B6F"/>
                 </a:solidFill>
                 <a:latin typeface="Amiri" pitchFamily="2" charset="-78"/>
+                <a:ea typeface="Amiri" pitchFamily="2" charset="-78"/>
                 <a:cs typeface="Amiri" pitchFamily="2" charset="-78"/>
               </a:rPr>
               <a:t>إِذَا أَطْفَأْنَا الأَجْهِزَةَ، مَاذَا يَحْدُثُ؟</a:t>
@@ -25259,6 +25445,7 @@
                   <a:srgbClr val="D4AF37"/>
                 </a:solidFill>
                 <a:latin typeface="Amiri" pitchFamily="2" charset="-78"/>
+                <a:ea typeface="Amiri" pitchFamily="2" charset="-78"/>
                 <a:cs typeface="Amiri" pitchFamily="2" charset="-78"/>
               </a:rPr>
               <a:t>م</a:t>
@@ -25579,6 +25766,7 @@
                   <a:srgbClr val="8A6D1E"/>
                 </a:solidFill>
                 <a:latin typeface="Amiri" pitchFamily="2" charset="-78"/>
+                <a:ea typeface="Amiri" pitchFamily="2" charset="-78"/>
                 <a:cs typeface="Amiri" pitchFamily="2" charset="-78"/>
               </a:rPr>
               <a:t>نَمُوذَجُ الإِجَابَةِ</a:t>
@@ -25821,6 +26009,7 @@
                   <a:srgbClr val="1B3B6F"/>
                 </a:solidFill>
                 <a:latin typeface="Amiri" pitchFamily="2" charset="-78"/>
+                <a:ea typeface="Amiri" pitchFamily="2" charset="-78"/>
                 <a:cs typeface="Amiri" pitchFamily="2" charset="-78"/>
               </a:rPr>
               <a:t>أَرَى أَنَّهُ يَجِبُ عَلَيْهَا ذٰلِكَ، لِأَنَّ التَّجْرِبَةَ أَثْبَتَتْ أَنَّ النَّاسَ يَتَعَوَّدُونَ عَلَى البَدَائِلِ بِسُرْعَةٍ.</a:t>
@@ -25900,6 +26089,7 @@
                   <a:srgbClr val="1B3B6F"/>
                 </a:solidFill>
                 <a:latin typeface="Amiri" pitchFamily="2" charset="-78"/>
+                <a:ea typeface="Amiri" pitchFamily="2" charset="-78"/>
                 <a:cs typeface="Amiri" pitchFamily="2" charset="-78"/>
               </a:rPr>
               <a:t>هَلْ يَجِبُ عَلَى الحُكُومَةِ أَنْ تَمْنَعَ أَكْيَاسَ البْلَاسْتِيكِ؟</a:t>
@@ -26003,6 +26193,7 @@
                   <a:srgbClr val="1B3B6F"/>
                 </a:solidFill>
                 <a:latin typeface="Amiri" pitchFamily="2" charset="-78"/>
+                <a:ea typeface="Amiri" pitchFamily="2" charset="-78"/>
                 <a:cs typeface="Amiri" pitchFamily="2" charset="-78"/>
               </a:rPr>
               <a:t>صَحِيحٌ أَنَّ تَأْثِيرَ الفَرْدِ صَغِيرٌ، غَيْرَ أَنَّ مَلَايِينَ الأَفْرَادِ يَصْنَعُونَ فَرْقًا كَبِيرًا، كَمَا أَنَّ المِثَالَ الجَيِّدَ يَنْتَشِرُ.</a:t>
@@ -26079,6 +26270,7 @@
                   <a:srgbClr val="1B3B6F"/>
                 </a:solidFill>
                 <a:latin typeface="Amiri" pitchFamily="2" charset="-78"/>
+                <a:ea typeface="Amiri" pitchFamily="2" charset="-78"/>
                 <a:cs typeface="Amiri" pitchFamily="2" charset="-78"/>
               </a:rPr>
               <a:t>هَلْ يَسْتَطِيعُ فَرْدٌ وَاحِدٌ أَنْ يُغَيِّرَ شَيْئًا؟</a:t>
@@ -26182,6 +26374,7 @@
                   <a:srgbClr val="1B3B6F"/>
                 </a:solidFill>
                 <a:latin typeface="Amiri" pitchFamily="2" charset="-78"/>
+                <a:ea typeface="Amiri" pitchFamily="2" charset="-78"/>
                 <a:cs typeface="Amiri" pitchFamily="2" charset="-78"/>
               </a:rPr>
               <a:t>مِنْ نَاحِيَةٍ، لَا تُخْرِجُ دُخَانًا فِي المَدِينَةِ، وَمِنْ نَاحِيَةٍ أُخْرَى، مَا زَالَتْ غَالِيَةً، وَتَحْتَاجُ بَطَّارِيَّاتُهَا إِلَى مَعَادِنَ نَادِرَةٍ.</a:t>
@@ -26258,6 +26451,7 @@
                   <a:srgbClr val="1B3B6F"/>
                 </a:solidFill>
                 <a:latin typeface="Amiri" pitchFamily="2" charset="-78"/>
+                <a:ea typeface="Amiri" pitchFamily="2" charset="-78"/>
                 <a:cs typeface="Amiri" pitchFamily="2" charset="-78"/>
               </a:rPr>
               <a:t>مَا رَأْيُكَ فِي السَّيَّارَاتِ الكَهْرَبَائِيَّةِ؟</a:t>
@@ -26467,6 +26661,7 @@
                   <a:srgbClr val="D4AF37"/>
                 </a:solidFill>
                 <a:latin typeface="Amiri" pitchFamily="2" charset="-78"/>
+                <a:ea typeface="Amiri" pitchFamily="2" charset="-78"/>
                 <a:cs typeface="Amiri" pitchFamily="2" charset="-78"/>
               </a:rPr>
               <a:t>م</a:t>
@@ -26787,6 +26982,7 @@
                   <a:srgbClr val="8A6D1E"/>
                 </a:solidFill>
                 <a:latin typeface="Amiri" pitchFamily="2" charset="-78"/>
+                <a:ea typeface="Amiri" pitchFamily="2" charset="-78"/>
                 <a:cs typeface="Amiri" pitchFamily="2" charset="-78"/>
               </a:rPr>
               <a:t>نَمُوذَجُ الإِجَابَةِ</a:t>
@@ -27029,6 +27225,7 @@
                   <a:srgbClr val="1B3B6F"/>
                 </a:solidFill>
                 <a:latin typeface="Amiri" pitchFamily="2" charset="-78"/>
+                <a:ea typeface="Amiri" pitchFamily="2" charset="-78"/>
                 <a:cs typeface="Amiri" pitchFamily="2" charset="-78"/>
               </a:rPr>
               <a:t>يُمْكِنُ أَنْ نُبَيِّنَ لَهُمْ كَمْ سَيُوَفِّرُونَ مِنَ المَالِ، لِكَيْ يَرَوْا الفَائِدَةَ بِأَعْيُنِهِمْ.</a:t>
@@ -27105,6 +27302,7 @@
                   <a:srgbClr val="1B3B6F"/>
                 </a:solidFill>
                 <a:latin typeface="Amiri" pitchFamily="2" charset="-78"/>
+                <a:ea typeface="Amiri" pitchFamily="2" charset="-78"/>
                 <a:cs typeface="Amiri" pitchFamily="2" charset="-78"/>
               </a:rPr>
               <a:t>كَيْفَ يُمْكِنُ أَنْ نُقْنِعَ الكِبَارَ بِتَغْيِيرِ عَادَاتِهِمْ؟</a:t>
@@ -27208,6 +27406,7 @@
                   <a:srgbClr val="1B3B6F"/>
                 </a:solidFill>
                 <a:latin typeface="Amiri" pitchFamily="2" charset="-78"/>
+                <a:ea typeface="Amiri" pitchFamily="2" charset="-78"/>
                 <a:cs typeface="Amiri" pitchFamily="2" charset="-78"/>
               </a:rPr>
               <a:t>لَوْ كُنْتُ وَزِيرًا لِلْبِيئَةِ، لَجَعَلْتُ المُوَاصَلَاتِ العَامَّةَ مَجَّانِيَّةً لِلطُّلَّابِ، وَلَزَرَعْتُ غَابَةً حَوْلَ كُلِّ مَدِينَةٍ.</a:t>
@@ -27284,6 +27483,7 @@
                   <a:srgbClr val="1B3B6F"/>
                 </a:solidFill>
                 <a:latin typeface="Amiri" pitchFamily="2" charset="-78"/>
+                <a:ea typeface="Amiri" pitchFamily="2" charset="-78"/>
                 <a:cs typeface="Amiri" pitchFamily="2" charset="-78"/>
               </a:rPr>
               <a:t>لَوْ كُنْتَ وَزِيرًا لِلْبِيئَةِ، مَاذَا تَفْعَلُ أَوَّلًا؟</a:t>
@@ -27493,6 +27693,7 @@
                   <a:srgbClr val="D4AF37"/>
                 </a:solidFill>
                 <a:latin typeface="Amiri" pitchFamily="2" charset="-78"/>
+                <a:ea typeface="Amiri" pitchFamily="2" charset="-78"/>
                 <a:cs typeface="Amiri" pitchFamily="2" charset="-78"/>
               </a:rPr>
               <a:t>م</a:t>
@@ -27813,6 +28014,7 @@
                   <a:srgbClr val="8A6D1E"/>
                 </a:solidFill>
                 <a:latin typeface="Amiri" pitchFamily="2" charset="-78"/>
+                <a:ea typeface="Amiri" pitchFamily="2" charset="-78"/>
                 <a:cs typeface="Amiri" pitchFamily="2" charset="-78"/>
               </a:rPr>
               <a:t>قَيِّمْ عَمَلَكَ</a:t>
@@ -29057,6 +29259,7 @@
                   <a:srgbClr val="FFFFFF"/>
                 </a:solidFill>
                 <a:latin typeface="Amiri" pitchFamily="2" charset="-78"/>
+                <a:ea typeface="Amiri" pitchFamily="2" charset="-78"/>
                 <a:cs typeface="Amiri" pitchFamily="2" charset="-78"/>
               </a:rPr>
               <a:t>أَحْسَنْتُمْ! إِلَى اللِّقَاءِ</a:t>
@@ -29209,6 +29412,7 @@
                   <a:srgbClr val="D4AF37"/>
                 </a:solidFill>
                 <a:latin typeface="Amiri" pitchFamily="2" charset="-78"/>
+                <a:ea typeface="Amiri" pitchFamily="2" charset="-78"/>
                 <a:cs typeface="Amiri" pitchFamily="2" charset="-78"/>
               </a:rPr>
               <a:t>وَرْشَةُ الكِتَابَةِ</a:t>
@@ -29342,6 +29546,7 @@
                   <a:srgbClr val="D4AF37"/>
                 </a:solidFill>
                 <a:latin typeface="Amiri" pitchFamily="2" charset="-78"/>
+                <a:ea typeface="Amiri" pitchFamily="2" charset="-78"/>
                 <a:cs typeface="Amiri" pitchFamily="2" charset="-78"/>
               </a:rPr>
               <a:t>م</a:t>
@@ -29662,6 +29867,7 @@
                   <a:srgbClr val="8A6D1E"/>
                 </a:solidFill>
                 <a:latin typeface="Amiri" pitchFamily="2" charset="-78"/>
+                <a:ea typeface="Amiri" pitchFamily="2" charset="-78"/>
                 <a:cs typeface="Amiri" pitchFamily="2" charset="-78"/>
               </a:rPr>
               <a:t>خَرِيطَةُ الوَرْشَةِ</a:t>
@@ -29976,6 +30182,7 @@
                   <a:srgbClr val="1B3B6F"/>
                 </a:solidFill>
                 <a:latin typeface="Amiri" pitchFamily="2" charset="-78"/>
+                <a:ea typeface="Amiri" pitchFamily="2" charset="-78"/>
                 <a:cs typeface="Amiri" pitchFamily="2" charset="-78"/>
               </a:rPr>
               <a:t>كَيْفَ</a:t>
@@ -30252,6 +30459,7 @@
                   <a:srgbClr val="1E6B52"/>
                 </a:solidFill>
                 <a:latin typeface="Amiri" pitchFamily="2" charset="-78"/>
+                <a:ea typeface="Amiri" pitchFamily="2" charset="-78"/>
                 <a:cs typeface="Amiri" pitchFamily="2" charset="-78"/>
               </a:rPr>
               <a:t>تَمْثِيلُ الدَّوْرِ</a:t>
@@ -30528,6 +30736,7 @@
                   <a:srgbClr val="8A6D1E"/>
                 </a:solidFill>
                 <a:latin typeface="Amiri" pitchFamily="2" charset="-78"/>
+                <a:ea typeface="Amiri" pitchFamily="2" charset="-78"/>
                 <a:cs typeface="Amiri" pitchFamily="2" charset="-78"/>
               </a:rPr>
               <a:t>النَّمُوذَجُ</a:t>
@@ -30804,6 +31013,7 @@
                   <a:srgbClr val="1E6B52"/>
                 </a:solidFill>
                 <a:latin typeface="Amiri" pitchFamily="2" charset="-78"/>
+                <a:ea typeface="Amiri" pitchFamily="2" charset="-78"/>
                 <a:cs typeface="Amiri" pitchFamily="2" charset="-78"/>
               </a:rPr>
               <a:t>المُحَادَثَةُ</a:t>
@@ -31080,6 +31290,7 @@
                   <a:srgbClr val="8A6D1E"/>
                 </a:solidFill>
                 <a:latin typeface="Amiri" pitchFamily="2" charset="-78"/>
+                <a:ea typeface="Amiri" pitchFamily="2" charset="-78"/>
                 <a:cs typeface="Amiri" pitchFamily="2" charset="-78"/>
               </a:rPr>
               <a:t>قَيِّمْ</a:t>
@@ -31323,6 +31534,7 @@
                   <a:srgbClr val="D4AF37"/>
                 </a:solidFill>
                 <a:latin typeface="Amiri" pitchFamily="2" charset="-78"/>
+                <a:ea typeface="Amiri" pitchFamily="2" charset="-78"/>
                 <a:cs typeface="Amiri" pitchFamily="2" charset="-78"/>
               </a:rPr>
               <a:t>م</a:t>
@@ -31643,6 +31855,7 @@
                   <a:srgbClr val="8A6D1E"/>
                 </a:solidFill>
                 <a:latin typeface="Amiri" pitchFamily="2" charset="-78"/>
+                <a:ea typeface="Amiri" pitchFamily="2" charset="-78"/>
                 <a:cs typeface="Amiri" pitchFamily="2" charset="-78"/>
               </a:rPr>
               <a:t>امْتِحَانُ التَّحَدُّثِ</a:t>
@@ -32267,6 +32480,7 @@
                   <a:srgbClr val="1B3B6F"/>
                 </a:solidFill>
                 <a:latin typeface="Amiri" pitchFamily="2" charset="-78"/>
+                <a:ea typeface="Amiri" pitchFamily="2" charset="-78"/>
                 <a:cs typeface="Amiri" pitchFamily="2" charset="-78"/>
               </a:rPr>
               <a:t>عَفْوًا، هَلْ يُمْكِنُ أَنْ تُعِيدَ السُّؤَالَ؟</a:t>
@@ -32366,6 +32580,7 @@
                   <a:srgbClr val="1B3B6F"/>
                 </a:solidFill>
                 <a:latin typeface="Amiri" pitchFamily="2" charset="-78"/>
+                <a:ea typeface="Amiri" pitchFamily="2" charset="-78"/>
                 <a:cs typeface="Amiri" pitchFamily="2" charset="-78"/>
               </a:rPr>
               <a:t>لَحْظَةً، دَعْنِي أُفَكِّرُ …</a:t>
@@ -32465,6 +32680,7 @@
                   <a:srgbClr val="1B3B6F"/>
                 </a:solidFill>
                 <a:latin typeface="Amiri" pitchFamily="2" charset="-78"/>
+                <a:ea typeface="Amiri" pitchFamily="2" charset="-78"/>
                 <a:cs typeface="Amiri" pitchFamily="2" charset="-78"/>
               </a:rPr>
               <a:t>أَقْصِدُ …</a:t>
@@ -32636,6 +32852,7 @@
                   <a:srgbClr val="D4AF37"/>
                 </a:solidFill>
                 <a:latin typeface="Amiri" pitchFamily="2" charset="-78"/>
+                <a:ea typeface="Amiri" pitchFamily="2" charset="-78"/>
                 <a:cs typeface="Amiri" pitchFamily="2" charset="-78"/>
               </a:rPr>
               <a:t>م</a:t>
@@ -32956,6 +33173,7 @@
                   <a:srgbClr val="8A6D1E"/>
                 </a:solidFill>
                 <a:latin typeface="Amiri" pitchFamily="2" charset="-78"/>
+                <a:ea typeface="Amiri" pitchFamily="2" charset="-78"/>
                 <a:cs typeface="Amiri" pitchFamily="2" charset="-78"/>
               </a:rPr>
               <a:t>نَحْمِي البِيئَةَ</a:t>
@@ -33259,6 +33477,7 @@
                   <a:srgbClr val="1B3B6F"/>
                 </a:solidFill>
                 <a:latin typeface="Amiri" pitchFamily="2" charset="-78"/>
+                <a:ea typeface="Amiri" pitchFamily="2" charset="-78"/>
                 <a:cs typeface="Amiri" pitchFamily="2" charset="-78"/>
               </a:rPr>
               <a:t>يُعِيدُ التَّدْوِيرَ</a:t>
@@ -33416,6 +33635,7 @@
                   <a:srgbClr val="1B3B6F"/>
                 </a:solidFill>
                 <a:latin typeface="Amiri" pitchFamily="2" charset="-78"/>
+                <a:ea typeface="Amiri" pitchFamily="2" charset="-78"/>
                 <a:cs typeface="Amiri" pitchFamily="2" charset="-78"/>
               </a:rPr>
               <a:t>قَابِلٌ لِلتَّدْوِيرِ</a:t>
@@ -33519,6 +33739,7 @@
                   <a:srgbClr val="1B3B6F"/>
                 </a:solidFill>
                 <a:latin typeface="Amiri" pitchFamily="2" charset="-78"/>
+                <a:ea typeface="Amiri" pitchFamily="2" charset="-78"/>
                 <a:cs typeface="Amiri" pitchFamily="2" charset="-78"/>
               </a:rPr>
               <a:t>إِعَادَةُ التَّدْوِيرِ</a:t>
@@ -33622,6 +33843,7 @@
                   <a:srgbClr val="1B3B6F"/>
                 </a:solidFill>
                 <a:latin typeface="Amiri" pitchFamily="2" charset="-78"/>
+                <a:ea typeface="Amiri" pitchFamily="2" charset="-78"/>
                 <a:cs typeface="Amiri" pitchFamily="2" charset="-78"/>
               </a:rPr>
               <a:t>تُعِيدُ التَّدْوِيرَ</a:t>
@@ -33887,6 +34109,7 @@
                   <a:srgbClr val="1B3B6F"/>
                 </a:solidFill>
                 <a:latin typeface="Amiri" pitchFamily="2" charset="-78"/>
+                <a:ea typeface="Amiri" pitchFamily="2" charset="-78"/>
                 <a:cs typeface="Amiri" pitchFamily="2" charset="-78"/>
               </a:rPr>
               <a:t>يُوَفِّرُ</a:t>
@@ -34044,6 +34267,7 @@
                   <a:srgbClr val="1B3B6F"/>
                 </a:solidFill>
                 <a:latin typeface="Amiri" pitchFamily="2" charset="-78"/>
+                <a:ea typeface="Amiri" pitchFamily="2" charset="-78"/>
                 <a:cs typeface="Amiri" pitchFamily="2" charset="-78"/>
               </a:rPr>
               <a:t>تَوْفِيرٌ</a:t>
@@ -34147,6 +34371,7 @@
                   <a:srgbClr val="1B3B6F"/>
                 </a:solidFill>
                 <a:latin typeface="Amiri" pitchFamily="2" charset="-78"/>
+                <a:ea typeface="Amiri" pitchFamily="2" charset="-78"/>
                 <a:cs typeface="Amiri" pitchFamily="2" charset="-78"/>
               </a:rPr>
               <a:t>نُوَفِّرُ</a:t>
@@ -34250,6 +34475,7 @@
                   <a:srgbClr val="1B3B6F"/>
                 </a:solidFill>
                 <a:latin typeface="Amiri" pitchFamily="2" charset="-78"/>
+                <a:ea typeface="Amiri" pitchFamily="2" charset="-78"/>
                 <a:cs typeface="Amiri" pitchFamily="2" charset="-78"/>
               </a:rPr>
               <a:t>تُوَفِّرُ</a:t>
@@ -34515,6 +34741,7 @@
                   <a:srgbClr val="1B3B6F"/>
                 </a:solidFill>
                 <a:latin typeface="Amiri" pitchFamily="2" charset="-78"/>
+                <a:ea typeface="Amiri" pitchFamily="2" charset="-78"/>
                 <a:cs typeface="Amiri" pitchFamily="2" charset="-78"/>
               </a:rPr>
               <a:t>يُقَلِّلُ مِنْ …</a:t>
@@ -34672,6 +34899,7 @@
                   <a:srgbClr val="1B3B6F"/>
                 </a:solidFill>
                 <a:latin typeface="Amiri" pitchFamily="2" charset="-78"/>
+                <a:ea typeface="Amiri" pitchFamily="2" charset="-78"/>
                 <a:cs typeface="Amiri" pitchFamily="2" charset="-78"/>
               </a:rPr>
               <a:t>نُقَلِّلُ</a:t>
@@ -34775,6 +35003,7 @@
                   <a:srgbClr val="1B3B6F"/>
                 </a:solidFill>
                 <a:latin typeface="Amiri" pitchFamily="2" charset="-78"/>
+                <a:ea typeface="Amiri" pitchFamily="2" charset="-78"/>
                 <a:cs typeface="Amiri" pitchFamily="2" charset="-78"/>
               </a:rPr>
               <a:t>تُقَلِّلُ</a:t>
@@ -35040,6 +35269,7 @@
                   <a:srgbClr val="1B3B6F"/>
                 </a:solidFill>
                 <a:latin typeface="Amiri" pitchFamily="2" charset="-78"/>
+                <a:ea typeface="Amiri" pitchFamily="2" charset="-78"/>
                 <a:cs typeface="Amiri" pitchFamily="2" charset="-78"/>
               </a:rPr>
               <a:t>يَحْمِي</a:t>
@@ -35197,6 +35427,7 @@
                   <a:srgbClr val="1B3B6F"/>
                 </a:solidFill>
                 <a:latin typeface="Amiri" pitchFamily="2" charset="-78"/>
+                <a:ea typeface="Amiri" pitchFamily="2" charset="-78"/>
                 <a:cs typeface="Amiri" pitchFamily="2" charset="-78"/>
               </a:rPr>
               <a:t>حِمَايَةٌ</a:t>
@@ -35300,6 +35531,7 @@
                   <a:srgbClr val="1B3B6F"/>
                 </a:solidFill>
                 <a:latin typeface="Amiri" pitchFamily="2" charset="-78"/>
+                <a:ea typeface="Amiri" pitchFamily="2" charset="-78"/>
                 <a:cs typeface="Amiri" pitchFamily="2" charset="-78"/>
               </a:rPr>
               <a:t>نَحْمِي</a:t>
@@ -35403,6 +35635,7 @@
                   <a:srgbClr val="1B3B6F"/>
                 </a:solidFill>
                 <a:latin typeface="Amiri" pitchFamily="2" charset="-78"/>
+                <a:ea typeface="Amiri" pitchFamily="2" charset="-78"/>
                 <a:cs typeface="Amiri" pitchFamily="2" charset="-78"/>
               </a:rPr>
               <a:t>تَحْمِي</a:t>
@@ -35668,6 +35901,7 @@
                   <a:srgbClr val="1B3B6F"/>
                 </a:solidFill>
                 <a:latin typeface="Amiri" pitchFamily="2" charset="-78"/>
+                <a:ea typeface="Amiri" pitchFamily="2" charset="-78"/>
                 <a:cs typeface="Amiri" pitchFamily="2" charset="-78"/>
               </a:rPr>
               <a:t>يَزْرَعُ</a:t>
@@ -35825,6 +36059,7 @@
                   <a:srgbClr val="1B3B6F"/>
                 </a:solidFill>
                 <a:latin typeface="Amiri" pitchFamily="2" charset="-78"/>
+                <a:ea typeface="Amiri" pitchFamily="2" charset="-78"/>
                 <a:cs typeface="Amiri" pitchFamily="2" charset="-78"/>
               </a:rPr>
               <a:t>شَجَرَةٌ · أَشْجَارٌ</a:t>
@@ -35928,6 +36163,7 @@
                   <a:srgbClr val="1B3B6F"/>
                 </a:solidFill>
                 <a:latin typeface="Amiri" pitchFamily="2" charset="-78"/>
+                <a:ea typeface="Amiri" pitchFamily="2" charset="-78"/>
                 <a:cs typeface="Amiri" pitchFamily="2" charset="-78"/>
               </a:rPr>
               <a:t>يَزْرَعُونَ</a:t>
@@ -36031,6 +36267,7 @@
                   <a:srgbClr val="1B3B6F"/>
                 </a:solidFill>
                 <a:latin typeface="Amiri" pitchFamily="2" charset="-78"/>
+                <a:ea typeface="Amiri" pitchFamily="2" charset="-78"/>
                 <a:cs typeface="Amiri" pitchFamily="2" charset="-78"/>
               </a:rPr>
               <a:t>تَزْرَعُ</a:t>
@@ -36296,6 +36533,7 @@
                   <a:srgbClr val="1B3B6F"/>
                 </a:solidFill>
                 <a:latin typeface="Amiri" pitchFamily="2" charset="-78"/>
+                <a:ea typeface="Amiri" pitchFamily="2" charset="-78"/>
                 <a:cs typeface="Amiri" pitchFamily="2" charset="-78"/>
               </a:rPr>
               <a:t>الطَّاقَةُ</a:t>
@@ -36453,6 +36691,7 @@
                   <a:srgbClr val="1B3B6F"/>
                 </a:solidFill>
                 <a:latin typeface="Amiri" pitchFamily="2" charset="-78"/>
+                <a:ea typeface="Amiri" pitchFamily="2" charset="-78"/>
                 <a:cs typeface="Amiri" pitchFamily="2" charset="-78"/>
               </a:rPr>
               <a:t>مُتَجَدِّدَةٌ</a:t>
@@ -36556,6 +36795,7 @@
                   <a:srgbClr val="1B3B6F"/>
                 </a:solidFill>
                 <a:latin typeface="Amiri" pitchFamily="2" charset="-78"/>
+                <a:ea typeface="Amiri" pitchFamily="2" charset="-78"/>
                 <a:cs typeface="Amiri" pitchFamily="2" charset="-78"/>
               </a:rPr>
               <a:t>الطَّاقَةُ الشَّمْسِيَّةُ</a:t>
@@ -36689,6 +36929,7 @@
                   <a:srgbClr val="D4AF37"/>
                 </a:solidFill>
                 <a:latin typeface="Amiri" pitchFamily="2" charset="-78"/>
+                <a:ea typeface="Amiri" pitchFamily="2" charset="-78"/>
                 <a:cs typeface="Amiri" pitchFamily="2" charset="-78"/>
               </a:rPr>
               <a:t>م</a:t>
@@ -37009,6 +37250,7 @@
                   <a:srgbClr val="8A6D1E"/>
                 </a:solidFill>
                 <a:latin typeface="Amiri" pitchFamily="2" charset="-78"/>
+                <a:ea typeface="Amiri" pitchFamily="2" charset="-78"/>
                 <a:cs typeface="Amiri" pitchFamily="2" charset="-78"/>
               </a:rPr>
               <a:t>النَّصِيحَةُ وَالمَسْؤُولِيَّةُ</a:t>
@@ -37312,6 +37554,7 @@
                   <a:srgbClr val="1B3B6F"/>
                 </a:solidFill>
                 <a:latin typeface="Amiri" pitchFamily="2" charset="-78"/>
+                <a:ea typeface="Amiri" pitchFamily="2" charset="-78"/>
                 <a:cs typeface="Amiri" pitchFamily="2" charset="-78"/>
               </a:rPr>
               <a:t>المُوَاصَلَاتُ العَامَّةُ</a:t>
@@ -37469,6 +37712,7 @@
                   <a:srgbClr val="1B3B6F"/>
                 </a:solidFill>
                 <a:latin typeface="Amiri" pitchFamily="2" charset="-78"/>
+                <a:ea typeface="Amiri" pitchFamily="2" charset="-78"/>
                 <a:cs typeface="Amiri" pitchFamily="2" charset="-78"/>
               </a:rPr>
               <a:t>دَرَّاجَةٌ</a:t>
@@ -37572,6 +37816,7 @@
                   <a:srgbClr val="1B3B6F"/>
                 </a:solidFill>
                 <a:latin typeface="Amiri" pitchFamily="2" charset="-78"/>
+                <a:ea typeface="Amiri" pitchFamily="2" charset="-78"/>
                 <a:cs typeface="Amiri" pitchFamily="2" charset="-78"/>
               </a:rPr>
               <a:t>الحَافِلَةُ · القِطَارُ</a:t>
@@ -37837,6 +38082,7 @@
                   <a:srgbClr val="1B3B6F"/>
                 </a:solidFill>
                 <a:latin typeface="Amiri" pitchFamily="2" charset="-78"/>
+                <a:ea typeface="Amiri" pitchFamily="2" charset="-78"/>
                 <a:cs typeface="Amiri" pitchFamily="2" charset="-78"/>
               </a:rPr>
               <a:t>يَنْبَغِي أَنْ …</a:t>
@@ -37994,6 +38240,7 @@
                   <a:srgbClr val="1B3B6F"/>
                 </a:solidFill>
                 <a:latin typeface="Amiri" pitchFamily="2" charset="-78"/>
+                <a:ea typeface="Amiri" pitchFamily="2" charset="-78"/>
                 <a:cs typeface="Amiri" pitchFamily="2" charset="-78"/>
               </a:rPr>
               <a:t>يَنْبَغِي أَنْ تُطْفِئَ</a:t>
@@ -38097,6 +38344,7 @@
                   <a:srgbClr val="1B3B6F"/>
                 </a:solidFill>
                 <a:latin typeface="Amiri" pitchFamily="2" charset="-78"/>
+                <a:ea typeface="Amiri" pitchFamily="2" charset="-78"/>
                 <a:cs typeface="Amiri" pitchFamily="2" charset="-78"/>
               </a:rPr>
               <a:t>يَنْبَغِي أَنْ نُقَلِّلَ</a:t>
@@ -38362,6 +38610,7 @@
                   <a:srgbClr val="1B3B6F"/>
                 </a:solidFill>
                 <a:latin typeface="Amiri" pitchFamily="2" charset="-78"/>
+                <a:ea typeface="Amiri" pitchFamily="2" charset="-78"/>
                 <a:cs typeface="Amiri" pitchFamily="2" charset="-78"/>
               </a:rPr>
               <a:t>يَجِبُ عَلَى … أَنْ</a:t>
@@ -38519,6 +38768,7 @@
                   <a:srgbClr val="1B3B6F"/>
                 </a:solidFill>
                 <a:latin typeface="Amiri" pitchFamily="2" charset="-78"/>
+                <a:ea typeface="Amiri" pitchFamily="2" charset="-78"/>
                 <a:cs typeface="Amiri" pitchFamily="2" charset="-78"/>
               </a:rPr>
               <a:t>يَجِبُ عَلَيْنَا أَنْ</a:t>
@@ -38622,6 +38872,7 @@
                   <a:srgbClr val="1B3B6F"/>
                 </a:solidFill>
                 <a:latin typeface="Amiri" pitchFamily="2" charset="-78"/>
+                <a:ea typeface="Amiri" pitchFamily="2" charset="-78"/>
                 <a:cs typeface="Amiri" pitchFamily="2" charset="-78"/>
               </a:rPr>
               <a:t>يَجِبُ عَلَى الحُكُومَةِ أَنْ</a:t>
@@ -38887,6 +39138,7 @@
                   <a:srgbClr val="1B3B6F"/>
                 </a:solidFill>
                 <a:latin typeface="Amiri" pitchFamily="2" charset="-78"/>
+                <a:ea typeface="Amiri" pitchFamily="2" charset="-78"/>
                 <a:cs typeface="Amiri" pitchFamily="2" charset="-78"/>
               </a:rPr>
               <a:t>لِكَيْ …</a:t>
@@ -39044,6 +39296,7 @@
                   <a:srgbClr val="1B3B6F"/>
                 </a:solidFill>
                 <a:latin typeface="Amiri" pitchFamily="2" charset="-78"/>
+                <a:ea typeface="Amiri" pitchFamily="2" charset="-78"/>
                 <a:cs typeface="Amiri" pitchFamily="2" charset="-78"/>
               </a:rPr>
               <a:t>لِنَحْمِيَ</a:t>
@@ -39147,6 +39400,7 @@
                   <a:srgbClr val="1B3B6F"/>
                 </a:solidFill>
                 <a:latin typeface="Amiri" pitchFamily="2" charset="-78"/>
+                <a:ea typeface="Amiri" pitchFamily="2" charset="-78"/>
                 <a:cs typeface="Amiri" pitchFamily="2" charset="-78"/>
               </a:rPr>
               <a:t>لِكَيْ نَحْمِيَ</a:t>
@@ -39412,6 +39666,7 @@
                   <a:srgbClr val="1B3B6F"/>
                 </a:solidFill>
                 <a:latin typeface="Amiri" pitchFamily="2" charset="-78"/>
+                <a:ea typeface="Amiri" pitchFamily="2" charset="-78"/>
                 <a:cs typeface="Amiri" pitchFamily="2" charset="-78"/>
               </a:rPr>
               <a:t>مَسْؤُولٌ عَنْ …</a:t>
@@ -39569,6 +39824,7 @@
                   <a:srgbClr val="1B3B6F"/>
                 </a:solidFill>
                 <a:latin typeface="Amiri" pitchFamily="2" charset="-78"/>
+                <a:ea typeface="Amiri" pitchFamily="2" charset="-78"/>
                 <a:cs typeface="Amiri" pitchFamily="2" charset="-78"/>
               </a:rPr>
               <a:t>مَسْؤُولِيَّةٌ</a:t>
@@ -39672,6 +39928,7 @@
                   <a:srgbClr val="1B3B6F"/>
                 </a:solidFill>
                 <a:latin typeface="Amiri" pitchFamily="2" charset="-78"/>
+                <a:ea typeface="Amiri" pitchFamily="2" charset="-78"/>
                 <a:cs typeface="Amiri" pitchFamily="2" charset="-78"/>
               </a:rPr>
               <a:t>مَسْؤُولَةٌ</a:t>
@@ -39937,6 +40194,7 @@
                   <a:srgbClr val="1B3B6F"/>
                 </a:solidFill>
                 <a:latin typeface="Amiri" pitchFamily="2" charset="-78"/>
+                <a:ea typeface="Amiri" pitchFamily="2" charset="-78"/>
                 <a:cs typeface="Amiri" pitchFamily="2" charset="-78"/>
               </a:rPr>
               <a:t>حَمْلَةٌ</a:t>
@@ -40094,6 +40352,7 @@
                   <a:srgbClr val="1B3B6F"/>
                 </a:solidFill>
                 <a:latin typeface="Amiri" pitchFamily="2" charset="-78"/>
+                <a:ea typeface="Amiri" pitchFamily="2" charset="-78"/>
                 <a:cs typeface="Amiri" pitchFamily="2" charset="-78"/>
               </a:rPr>
               <a:t>حَمْلَةُ تَوْعِيَةٍ</a:t>
@@ -40197,6 +40456,7 @@
                   <a:srgbClr val="1B3B6F"/>
                 </a:solidFill>
                 <a:latin typeface="Amiri" pitchFamily="2" charset="-78"/>
+                <a:ea typeface="Amiri" pitchFamily="2" charset="-78"/>
                 <a:cs typeface="Amiri" pitchFamily="2" charset="-78"/>
               </a:rPr>
               <a:t>حَمَلَاتٌ</a:t>
@@ -40330,6 +40590,7 @@
                   <a:srgbClr val="D4AF37"/>
                 </a:solidFill>
                 <a:latin typeface="Amiri" pitchFamily="2" charset="-78"/>
+                <a:ea typeface="Amiri" pitchFamily="2" charset="-78"/>
                 <a:cs typeface="Amiri" pitchFamily="2" charset="-78"/>
               </a:rPr>
               <a:t>م</a:t>
@@ -40650,6 +40911,7 @@
                   <a:srgbClr val="8A6D1E"/>
                 </a:solidFill>
                 <a:latin typeface="Amiri" pitchFamily="2" charset="-78"/>
+                <a:ea typeface="Amiri" pitchFamily="2" charset="-78"/>
                 <a:cs typeface="Amiri" pitchFamily="2" charset="-78"/>
               </a:rPr>
               <a:t>فِي الغُرَفِ</a:t>
@@ -41826,6 +42088,7 @@
                   <a:srgbClr val="1B3B6F"/>
                 </a:solidFill>
                 <a:latin typeface="Amiri" pitchFamily="2" charset="-78"/>
+                <a:ea typeface="Amiri" pitchFamily="2" charset="-78"/>
                 <a:cs typeface="Amiri" pitchFamily="2" charset="-78"/>
               </a:rPr>
               <a:t>دَوْرُكَ!</a:t>
@@ -41902,6 +42165,7 @@
                   <a:srgbClr val="1B3B6F"/>
                 </a:solidFill>
                 <a:latin typeface="Amiri" pitchFamily="2" charset="-78"/>
+                <a:ea typeface="Amiri" pitchFamily="2" charset="-78"/>
                 <a:cs typeface="Amiri" pitchFamily="2" charset="-78"/>
               </a:rPr>
               <a:t>أَحْسَنْتَ! / أَحْسَنْتِ!</a:t>
@@ -41978,6 +42242,7 @@
                   <a:srgbClr val="1B3B6F"/>
                 </a:solidFill>
                 <a:latin typeface="Amiri" pitchFamily="2" charset="-78"/>
+                <a:ea typeface="Amiri" pitchFamily="2" charset="-78"/>
                 <a:cs typeface="Amiri" pitchFamily="2" charset="-78"/>
               </a:rPr>
               <a:t>تَكَلَّمْ أَكْثَرَ، مِنْ فَضْلِكَ</a:t>
@@ -42054,6 +42319,7 @@
                   <a:srgbClr val="1B3B6F"/>
                 </a:solidFill>
                 <a:latin typeface="Amiri" pitchFamily="2" charset="-78"/>
+                <a:ea typeface="Amiri" pitchFamily="2" charset="-78"/>
                 <a:cs typeface="Amiri" pitchFamily="2" charset="-78"/>
               </a:rPr>
               <a:t>لِمَاذَا؟</a:t>
@@ -42225,6 +42491,7 @@
                   <a:srgbClr val="D4AF37"/>
                 </a:solidFill>
                 <a:latin typeface="Amiri" pitchFamily="2" charset="-78"/>
+                <a:ea typeface="Amiri" pitchFamily="2" charset="-78"/>
                 <a:cs typeface="Amiri" pitchFamily="2" charset="-78"/>
               </a:rPr>
               <a:t>م</a:t>
@@ -42545,6 +42812,7 @@
                   <a:srgbClr val="8A6D1E"/>
                 </a:solidFill>
                 <a:latin typeface="Amiri" pitchFamily="2" charset="-78"/>
+                <a:ea typeface="Amiri" pitchFamily="2" charset="-78"/>
                 <a:cs typeface="Amiri" pitchFamily="2" charset="-78"/>
               </a:rPr>
               <a:t>فِي نَادِي البِيئَةِ</a:t>
@@ -42825,6 +43093,7 @@
                   <a:srgbClr val="1B3B6F"/>
                 </a:solidFill>
                 <a:latin typeface="Amiri" pitchFamily="2" charset="-78"/>
+                <a:ea typeface="Amiri" pitchFamily="2" charset="-78"/>
                 <a:cs typeface="Amiri" pitchFamily="2" charset="-78"/>
               </a:rPr>
               <a:t>لِأَنِّي أُرِيدُ أَنْ …</a:t>
@@ -42901,6 +43170,7 @@
                   <a:srgbClr val="1B3B6F"/>
                 </a:solidFill>
                 <a:latin typeface="Amiri" pitchFamily="2" charset="-78"/>
+                <a:ea typeface="Amiri" pitchFamily="2" charset="-78"/>
                 <a:cs typeface="Amiri" pitchFamily="2" charset="-78"/>
               </a:rPr>
               <a:t>أَهْلًا! لِمَاذَا تُرِيدُ أَنْ تَنْضَمَّ إِلَى النَّادِي؟</a:t>
@@ -43069,6 +43339,7 @@
                   <a:srgbClr val="1B3B6F"/>
                 </a:solidFill>
                 <a:latin typeface="Amiri" pitchFamily="2" charset="-78"/>
+                <a:ea typeface="Amiri" pitchFamily="2" charset="-78"/>
                 <a:cs typeface="Amiri" pitchFamily="2" charset="-78"/>
               </a:rPr>
               <a:t>أُعِيدُ … / أُطْفِئُ …</a:t>
@@ -43145,6 +43416,7 @@
                   <a:srgbClr val="1B3B6F"/>
                 </a:solidFill>
                 <a:latin typeface="Amiri" pitchFamily="2" charset="-78"/>
+                <a:ea typeface="Amiri" pitchFamily="2" charset="-78"/>
                 <a:cs typeface="Amiri" pitchFamily="2" charset="-78"/>
               </a:rPr>
               <a:t>مَاذَا تَفْعَلُ فِي البَيْتِ لِلْبِيئَةِ؟</a:t>
@@ -43313,6 +43585,7 @@
                   <a:srgbClr val="1B3B6F"/>
                 </a:solidFill>
                 <a:latin typeface="Amiri" pitchFamily="2" charset="-78"/>
+                <a:ea typeface="Amiri" pitchFamily="2" charset="-78"/>
                 <a:cs typeface="Amiri" pitchFamily="2" charset="-78"/>
               </a:rPr>
               <a:t>يَنْبَغِي أَنْ …</a:t>
@@ -43389,6 +43662,7 @@
                   <a:srgbClr val="1B3B6F"/>
                 </a:solidFill>
                 <a:latin typeface="Amiri" pitchFamily="2" charset="-78"/>
+                <a:ea typeface="Amiri" pitchFamily="2" charset="-78"/>
                 <a:cs typeface="Amiri" pitchFamily="2" charset="-78"/>
               </a:rPr>
               <a:t>مَا فِكْرَتُكَ لِلْمَدْرَسَةِ؟</a:t>
@@ -43557,6 +43831,7 @@
                   <a:srgbClr val="1B3B6F"/>
                 </a:solidFill>
                 <a:latin typeface="Amiri" pitchFamily="2" charset="-78"/>
+                <a:ea typeface="Amiri" pitchFamily="2" charset="-78"/>
                 <a:cs typeface="Amiri" pitchFamily="2" charset="-78"/>
               </a:rPr>
               <a:t>مَتَى … وَأَيْنَ …؟</a:t>
@@ -43633,6 +43908,7 @@
                   <a:srgbClr val="1B3B6F"/>
                 </a:solidFill>
                 <a:latin typeface="Amiri" pitchFamily="2" charset="-78"/>
+                <a:ea typeface="Amiri" pitchFamily="2" charset="-78"/>
                 <a:cs typeface="Amiri" pitchFamily="2" charset="-78"/>
               </a:rPr>
               <a:t>نَجْتَمِعُ كُلَّ أُسْبُوعٍ.</a:t>
@@ -43801,6 +44077,7 @@
                   <a:srgbClr val="1B3B6F"/>
                 </a:solidFill>
                 <a:latin typeface="Amiri" pitchFamily="2" charset="-78"/>
+                <a:ea typeface="Amiri" pitchFamily="2" charset="-78"/>
                 <a:cs typeface="Amiri" pitchFamily="2" charset="-78"/>
               </a:rPr>
               <a:t>نَعَمْ، أَزْرَعُ … / لَا، …</a:t>
@@ -43877,6 +44154,7 @@
                   <a:srgbClr val="1B3B6F"/>
                 </a:solidFill>
                 <a:latin typeface="Amiri" pitchFamily="2" charset="-78"/>
+                <a:ea typeface="Amiri" pitchFamily="2" charset="-78"/>
                 <a:cs typeface="Amiri" pitchFamily="2" charset="-78"/>
               </a:rPr>
               <a:t>هَلْ تَزْرَعُ شَيْئًا فِي البَيْتِ؟</a:t>
@@ -44151,6 +44429,7 @@
                   <a:srgbClr val="D4AF37"/>
                 </a:solidFill>
                 <a:latin typeface="Amiri" pitchFamily="2" charset="-78"/>
+                <a:ea typeface="Amiri" pitchFamily="2" charset="-78"/>
                 <a:cs typeface="Amiri" pitchFamily="2" charset="-78"/>
               </a:rPr>
               <a:t>م</a:t>
@@ -44471,6 +44750,7 @@
                   <a:srgbClr val="8A6D1E"/>
                 </a:solidFill>
                 <a:latin typeface="Amiri" pitchFamily="2" charset="-78"/>
+                <a:ea typeface="Amiri" pitchFamily="2" charset="-78"/>
                 <a:cs typeface="Amiri" pitchFamily="2" charset="-78"/>
               </a:rPr>
               <a:t>أُسْرَةٌ صَدِيقَةٌ لِلْبِيئَةِ</a:t>
@@ -44751,6 +45031,7 @@
                   <a:srgbClr val="1B3B6F"/>
                 </a:solidFill>
                 <a:latin typeface="Amiri" pitchFamily="2" charset="-78"/>
+                <a:ea typeface="Amiri" pitchFamily="2" charset="-78"/>
                 <a:cs typeface="Amiri" pitchFamily="2" charset="-78"/>
               </a:rPr>
               <a:t>يَنْبَغِي أَنْ نُطْفِئَ …</a:t>
@@ -44827,6 +45108,7 @@
                   <a:srgbClr val="1B3B6F"/>
                 </a:solidFill>
                 <a:latin typeface="Amiri" pitchFamily="2" charset="-78"/>
+                <a:ea typeface="Amiri" pitchFamily="2" charset="-78"/>
                 <a:cs typeface="Amiri" pitchFamily="2" charset="-78"/>
               </a:rPr>
               <a:t>فَاتُورَةُ الكَهْرَبَاءِ غَالِيَةٌ جِدًّا هٰذَا الشَّهْرَ!</a:t>
@@ -44995,6 +45277,7 @@
                   <a:srgbClr val="1B3B6F"/>
                 </a:solidFill>
                 <a:latin typeface="Amiri" pitchFamily="2" charset="-78"/>
+                <a:ea typeface="Amiri" pitchFamily="2" charset="-78"/>
                 <a:cs typeface="Amiri" pitchFamily="2" charset="-78"/>
               </a:rPr>
               <a:t>نَسْتَطِيعُ أَنْ …</a:t>
@@ -45071,6 +45354,7 @@
                   <a:srgbClr val="1B3B6F"/>
                 </a:solidFill>
                 <a:latin typeface="Amiri" pitchFamily="2" charset="-78"/>
+                <a:ea typeface="Amiri" pitchFamily="2" charset="-78"/>
                 <a:cs typeface="Amiri" pitchFamily="2" charset="-78"/>
               </a:rPr>
               <a:t>وَالمَاءُ؟</a:t>
@@ -45239,6 +45523,7 @@
                   <a:srgbClr val="1B3B6F"/>
                 </a:solidFill>
                 <a:latin typeface="Amiri" pitchFamily="2" charset="-78"/>
+                <a:ea typeface="Amiri" pitchFamily="2" charset="-78"/>
                 <a:cs typeface="Amiri" pitchFamily="2" charset="-78"/>
               </a:rPr>
               <a:t>هَلْ يُمْكِنُ أَنْ …؟</a:t>
@@ -45315,6 +45600,7 @@
                   <a:srgbClr val="1B3B6F"/>
                 </a:solidFill>
                 <a:latin typeface="Amiri" pitchFamily="2" charset="-78"/>
+                <a:ea typeface="Amiri" pitchFamily="2" charset="-78"/>
                 <a:cs typeface="Amiri" pitchFamily="2" charset="-78"/>
               </a:rPr>
               <a:t>فِكْرَةٌ جَيِّدَةٌ، لٰكِنَّ إِخْوَتَكَ لَا يَسْمَعُونَ!</a:t>
@@ -45418,6 +45704,7 @@
                   <a:srgbClr val="1B3B6F"/>
                 </a:solidFill>
                 <a:latin typeface="Amiri" pitchFamily="2" charset="-78"/>
+                <a:ea typeface="Amiri" pitchFamily="2" charset="-78"/>
                 <a:cs typeface="Amiri" pitchFamily="2" charset="-78"/>
               </a:rPr>
               <a:t>نَسْتَطِيعُ أَنْ … لِكَيْ …</a:t>
@@ -45494,6 +45781,7 @@
                   <a:srgbClr val="1B3B6F"/>
                 </a:solidFill>
                 <a:latin typeface="Amiri" pitchFamily="2" charset="-78"/>
+                <a:ea typeface="Amiri" pitchFamily="2" charset="-78"/>
                 <a:cs typeface="Amiri" pitchFamily="2" charset="-78"/>
               </a:rPr>
               <a:t>وَمَاذَا عَنِ السَّيَّارَةِ؟ نَسْتَخْدِمُهَا كُلَّ يَوْمٍ.</a:t>
@@ -45597,6 +45885,7 @@
                   <a:srgbClr val="1B3B6F"/>
                 </a:solidFill>
                 <a:latin typeface="Amiri" pitchFamily="2" charset="-78"/>
+                <a:ea typeface="Amiri" pitchFamily="2" charset="-78"/>
                 <a:cs typeface="Amiri" pitchFamily="2" charset="-78"/>
               </a:rPr>
               <a:t>نَعَمْ، سَأَفْرِزُ … وَ…</a:t>
@@ -45673,6 +45962,7 @@
                   <a:srgbClr val="1B3B6F"/>
                 </a:solidFill>
                 <a:latin typeface="Amiri" pitchFamily="2" charset="-78"/>
+                <a:ea typeface="Amiri" pitchFamily="2" charset="-78"/>
                 <a:cs typeface="Amiri" pitchFamily="2" charset="-78"/>
               </a:rPr>
               <a:t>هَلْ سَتُسَاعِدُ فِي فَرْزِ النُّفَايَاتِ؟</a:t>
@@ -45847,13 +46137,9 @@
     <a:fontScheme name="Office">
       <a:majorFont>
         <a:latin typeface="Calibri Light" panose="020F0302020204030204"/>
-        <a:ea typeface=""/>
-        <a:cs typeface=""/>
-        <a:font script="Jpan" typeface="游ゴシック Light"/>
-        <a:font script="Hang" typeface="맑은 고딕"/>
-        <a:font script="Hans" typeface="等线 Light"/>
-        <a:font script="Hant" typeface="新細明體"/>
-        <a:font script="Arab" typeface="Times New Roman"/>
+        <a:ea typeface="Amiri" pitchFamily="2" charset="-78"/>
+        <a:cs typeface="Amiri" pitchFamily="2" charset="-78"/>
+        <a:font script="Arab" typeface="Amiri"/>
         <a:font script="Hebr" typeface="Times New Roman"/>
         <a:font script="Thai" typeface="Angsana New"/>
         <a:font script="Ethi" typeface="Nyala"/>
@@ -45899,13 +46185,9 @@
       </a:majorFont>
       <a:minorFont>
         <a:latin typeface="Calibri" panose="020F0502020204030204"/>
-        <a:ea typeface=""/>
-        <a:cs typeface=""/>
-        <a:font script="Jpan" typeface="游ゴシック"/>
-        <a:font script="Hang" typeface="맑은 고딕"/>
-        <a:font script="Hans" typeface="等线"/>
-        <a:font script="Hant" typeface="新細明體"/>
-        <a:font script="Arab" typeface="Arial"/>
+        <a:ea typeface="Amiri" pitchFamily="2" charset="-78"/>
+        <a:cs typeface="Amiri" pitchFamily="2" charset="-78"/>
+        <a:font script="Arab" typeface="Amiri"/>
         <a:font script="Hebr" typeface="Arial"/>
         <a:font script="Thai" typeface="Cordia New"/>
         <a:font script="Ethi" typeface="Nyala"/>
